--- a/deck/دستور-عرش-الخميس-v12.pptx
+++ b/deck/دستور-عرش-الخميس-v12.pptx
@@ -26,9 +26,10 @@
     <p:sldId id="274" r:id="rId20"/>
     <p:sldId id="275" r:id="rId21"/>
     <p:sldId id="276" r:id="rId22"/>
+    <p:sldId id="277" r:id="rId23"/>
   </p:sldIdLst>
   <p:notesMasterIdLst>
-    <p:notesMasterId r:id="rId23"/>
+    <p:notesMasterId r:id="rId24"/>
   </p:notesMasterIdLst>
   <p:sldSz cx="12192000" cy="6858000"/>
   <p:notesSz cx="6858000" cy="12192000"/>
@@ -3328,7 +3329,7 @@
           <a:p>
             <a:r>
               <a:rPr lang="en-US" dirty="0"/>
-              <a:t/>
+              <a:t>شريحة استراحة — تخفّف الجو بعد قسم الحرب وقبل الترتيب.</a:t>
             </a:r>
             <a:endParaRPr lang="en-US" dirty="0"/>
           </a:p>
@@ -4120,7 +4121,7 @@
           <a:p>
             <a:r>
               <a:rPr lang="en-US" dirty="0"/>
-              <a:t>المواد سارية من الدورة السادسة، وتُراجَع في نهاية كل دورة.</a:t>
+              <a:t/>
             </a:r>
             <a:endParaRPr lang="en-US" dirty="0"/>
           </a:p>
@@ -4144,6 +4145,94 @@
             <a:fld id="{F7021451-1387-4CA6-816F-3879F97B5CBC}" type="slidenum">
               <a:rPr lang="en-US"/>
               <a:t>21</a:t>
+            </a:fld>
+            <a:endParaRPr lang="en-US"/>
+          </a:p>
+        </p:txBody>
+      </p:sp>
+    </p:spTree>
+    <p:extLst>
+      <p:ext uri="{BB962C8B-B14F-4D97-AF65-F5344CB8AC3E}">
+        <p14:creationId xmlns:p14="http://schemas.microsoft.com/office/powerpoint/2010/main" val="1024086991"/>
+      </p:ext>
+    </p:extLst>
+  </p:cSld>
+  <p:clrMapOvr>
+    <a:masterClrMapping/>
+  </p:clrMapOvr>
+</p:notes>
+</file>
+
+<file path=ppt/notesSlides/notesSlide22.xml><?xml version="1.0" encoding="utf-8"?>
+<p:notes xmlns:a="http://schemas.openxmlformats.org/drawingml/2006/main" xmlns:r="http://schemas.openxmlformats.org/officeDocument/2006/relationships" xmlns:p="http://schemas.openxmlformats.org/presentationml/2006/main">
+  <p:cSld>
+    <p:spTree>
+      <p:nvGrpSpPr>
+        <p:cNvPr id="1" name=""/>
+        <p:cNvGrpSpPr/>
+        <p:nvPr/>
+      </p:nvGrpSpPr>
+      <p:grpSpPr>
+        <a:xfrm>
+          <a:off x="0" y="0"/>
+          <a:ext cx="0" cy="0"/>
+          <a:chOff x="0" y="0"/>
+          <a:chExt cx="0" cy="0"/>
+        </a:xfrm>
+      </p:grpSpPr>
+      <p:sp>
+        <p:nvSpPr>
+          <p:cNvPr id="2" name="Slide Image Placeholder 1"/>
+          <p:cNvSpPr>
+            <a:spLocks noGrp="1" noRot="1" noChangeAspect="1"/>
+          </p:cNvSpPr>
+          <p:nvPr>
+            <p:ph type="sldImg"/>
+          </p:nvPr>
+        </p:nvSpPr>
+        <p:spPr/>
+      </p:sp>
+      <p:sp>
+        <p:nvSpPr>
+          <p:cNvPr id="3" name="Notes Placeholder 2"/>
+          <p:cNvSpPr>
+            <a:spLocks noGrp="1"/>
+          </p:cNvSpPr>
+          <p:nvPr>
+            <p:ph type="body" idx="1"/>
+          </p:nvPr>
+        </p:nvSpPr>
+        <p:spPr/>
+        <p:txBody>
+          <a:bodyPr/>
+          <a:lstStyle/>
+          <a:p>
+            <a:r>
+              <a:rPr lang="en-US" dirty="0"/>
+              <a:t>المواد سارية من الدورة السادسة، وتُراجَع في نهاية كل دورة.</a:t>
+            </a:r>
+            <a:endParaRPr lang="en-US" dirty="0"/>
+          </a:p>
+        </p:txBody>
+      </p:sp>
+      <p:sp>
+        <p:nvSpPr>
+          <p:cNvPr id="4" name="Slide Number Placeholder 3"/>
+          <p:cNvSpPr>
+            <a:spLocks noGrp="1"/>
+          </p:cNvSpPr>
+          <p:nvPr>
+            <p:ph type="sldNum" sz="quarter" idx="10"/>
+          </p:nvPr>
+        </p:nvSpPr>
+        <p:spPr/>
+        <p:txBody>
+          <a:bodyPr/>
+          <a:lstStyle/>
+          <a:p>
+            <a:fld id="{F7021451-1387-4CA6-816F-3879F97B5CBC}" type="slidenum">
+              <a:rPr lang="en-US"/>
+              <a:t>22</a:t>
             </a:fld>
             <a:endParaRPr lang="en-US"/>
           </a:p>
@@ -6739,6 +6828,1040 @@
     <p:bg>
       <p:bgPr>
         <a:solidFill>
+          <a:srgbClr val="FAF7F2"/>
+        </a:solidFill>
+      </p:bgPr>
+    </p:bg>
+    <p:spTree>
+      <p:nvGrpSpPr>
+        <p:cNvPr id="1" name=""/>
+        <p:cNvGrpSpPr/>
+        <p:nvPr/>
+      </p:nvGrpSpPr>
+      <p:grpSpPr>
+        <a:xfrm>
+          <a:off x="0" y="0"/>
+          <a:ext cx="0" cy="0"/>
+          <a:chOff x="0" y="0"/>
+          <a:chExt cx="0" cy="0"/>
+        </a:xfrm>
+      </p:grpSpPr>
+      <p:sp>
+        <p:nvSpPr>
+          <p:cNvPr id="2" name="Text 0"/>
+          <p:cNvSpPr txBox="1"/>
+          <p:nvPr/>
+        </p:nvSpPr>
+        <p:spPr>
+          <a:xfrm>
+            <a:off x="640080" y="457200"/>
+            <a:ext cx="10881360" cy="685800"/>
+          </a:xfrm>
+          <a:prstGeom prst="rect">
+            <a:avLst/>
+          </a:prstGeom>
+          <a:noFill/>
+          <a:ln/>
+        </p:spPr>
+        <p:txBody>
+          <a:bodyPr wrap="square" lIns="0" tIns="0" rIns="0" bIns="0" rtlCol="0" anchor="ctr"/>
+          <a:lstStyle/>
+          <a:p>
+            <a:pPr rtl="1" algn="r" indent="0" marL="0">
+              <a:buNone/>
+            </a:pPr>
+            <a:r>
+              <a:rPr lang="en-US" sz="3400" b="1" dirty="0">
+                <a:solidFill>
+                  <a:srgbClr val="292524"/>
+                </a:solidFill>
+                <a:latin typeface="Arial" pitchFamily="34" charset="0"/>
+                <a:ea typeface="Arial" pitchFamily="34" charset="-122"/>
+                <a:cs typeface="Arial" pitchFamily="34" charset="-120"/>
+              </a:rPr>
+              <a:t>إحصائيات ما لها داعي… بس حلوة</a:t>
+            </a:r>
+            <a:endParaRPr lang="en-US" sz="3400" dirty="0"/>
+          </a:p>
+        </p:txBody>
+      </p:sp>
+      <p:sp>
+        <p:nvSpPr>
+          <p:cNvPr id="3" name="Text 1"/>
+          <p:cNvSpPr txBox="1"/>
+          <p:nvPr/>
+        </p:nvSpPr>
+        <p:spPr>
+          <a:xfrm>
+            <a:off x="640080" y="1097280"/>
+            <a:ext cx="10881360" cy="365760"/>
+          </a:xfrm>
+          <a:prstGeom prst="rect">
+            <a:avLst/>
+          </a:prstGeom>
+          <a:noFill/>
+          <a:ln/>
+        </p:spPr>
+        <p:txBody>
+          <a:bodyPr wrap="square" lIns="0" tIns="0" rIns="0" bIns="0" rtlCol="0" anchor="ctr"/>
+          <a:lstStyle/>
+          <a:p>
+            <a:pPr rtl="1" algn="r" indent="0" marL="0">
+              <a:buNone/>
+            </a:pPr>
+            <a:r>
+              <a:rPr lang="en-US" sz="1400" dirty="0">
+                <a:solidFill>
+                  <a:srgbClr val="78716C"/>
+                </a:solidFill>
+                <a:latin typeface="Arial" pitchFamily="34" charset="0"/>
+                <a:ea typeface="Arial" pitchFamily="34" charset="-122"/>
+                <a:cs typeface="Arial" pitchFamily="34" charset="-120"/>
+              </a:rPr>
+              <a:t>استراحة قصيرة قبل ما نرجع للجد</a:t>
+            </a:r>
+            <a:endParaRPr lang="en-US" sz="1400" dirty="0"/>
+          </a:p>
+        </p:txBody>
+      </p:sp>
+      <p:sp>
+        <p:nvSpPr>
+          <p:cNvPr id="4" name="Shape 2"/>
+          <p:cNvSpPr/>
+          <p:nvPr/>
+        </p:nvSpPr>
+        <p:spPr>
+          <a:xfrm>
+            <a:off x="8046720" y="1691640"/>
+            <a:ext cx="3474720" cy="2121408"/>
+          </a:xfrm>
+          <a:prstGeom prst="roundRect">
+            <a:avLst>
+              <a:gd name="adj" fmla="val 3879"/>
+            </a:avLst>
+          </a:prstGeom>
+          <a:solidFill>
+            <a:srgbClr val="FEF3C7"/>
+          </a:solidFill>
+          <a:ln w="12700">
+            <a:solidFill>
+              <a:srgbClr val="E7E5E4"/>
+            </a:solidFill>
+            <a:prstDash val="solid"/>
+          </a:ln>
+          <a:effectLst>
+            <a:outerShdw sx="100000" sy="100000" kx="0" ky="0" algn="bl" rotWithShape="0" blurRad="101600" dist="12700" dir="5400000">
+              <a:srgbClr val="000000">
+                <a:alpha val="7000"/>
+              </a:srgbClr>
+            </a:outerShdw>
+          </a:effectLst>
+        </p:spPr>
+      </p:sp>
+      <p:sp>
+        <p:nvSpPr>
+          <p:cNvPr id="5" name="Text 3"/>
+          <p:cNvSpPr txBox="1"/>
+          <p:nvPr/>
+        </p:nvSpPr>
+        <p:spPr>
+          <a:xfrm>
+            <a:off x="8275320" y="1892808"/>
+            <a:ext cx="3017520" cy="566928"/>
+          </a:xfrm>
+          <a:prstGeom prst="rect">
+            <a:avLst/>
+          </a:prstGeom>
+          <a:noFill/>
+          <a:ln/>
+        </p:spPr>
+        <p:txBody>
+          <a:bodyPr wrap="square" lIns="0" tIns="0" rIns="0" bIns="0" rtlCol="0" anchor="ctr"/>
+          <a:lstStyle/>
+          <a:p>
+            <a:pPr algn="ctr" indent="0" marL="0">
+              <a:buNone/>
+            </a:pPr>
+            <a:r>
+              <a:rPr lang="en-US" sz="3400" b="1" dirty="0">
+                <a:solidFill>
+                  <a:srgbClr val="10B981"/>
+                </a:solidFill>
+                <a:latin typeface="Arial" pitchFamily="34" charset="0"/>
+                <a:ea typeface="Arial" pitchFamily="34" charset="-122"/>
+                <a:cs typeface="Arial" pitchFamily="34" charset="-120"/>
+              </a:rPr>
+              <a:t>4.77</a:t>
+            </a:r>
+            <a:endParaRPr lang="en-US" sz="3400" dirty="0"/>
+          </a:p>
+        </p:txBody>
+      </p:sp>
+      <p:sp>
+        <p:nvSpPr>
+          <p:cNvPr id="6" name="Text 4"/>
+          <p:cNvSpPr txBox="1"/>
+          <p:nvPr/>
+        </p:nvSpPr>
+        <p:spPr>
+          <a:xfrm>
+            <a:off x="8275320" y="2478024"/>
+            <a:ext cx="3017520" cy="329184"/>
+          </a:xfrm>
+          <a:prstGeom prst="rect">
+            <a:avLst/>
+          </a:prstGeom>
+          <a:noFill/>
+          <a:ln/>
+        </p:spPr>
+        <p:txBody>
+          <a:bodyPr wrap="square" lIns="0" tIns="0" rIns="0" bIns="0" rtlCol="0" anchor="ctr"/>
+          <a:lstStyle/>
+          <a:p>
+            <a:pPr algn="ctr" indent="0" marL="0">
+              <a:buNone/>
+            </a:pPr>
+            <a:r>
+              <a:rPr lang="en-US" sz="1400" b="1" dirty="0">
+                <a:solidFill>
+                  <a:srgbClr val="292524"/>
+                </a:solidFill>
+                <a:latin typeface="Arial" pitchFamily="34" charset="0"/>
+                <a:ea typeface="Arial" pitchFamily="34" charset="-122"/>
+                <a:cs typeface="Arial" pitchFamily="34" charset="-120"/>
+              </a:rPr>
+              <a:t>عزائم البيوت</a:t>
+            </a:r>
+            <a:endParaRPr lang="en-US" sz="1400" dirty="0"/>
+          </a:p>
+        </p:txBody>
+      </p:sp>
+      <p:sp>
+        <p:nvSpPr>
+          <p:cNvPr id="7" name="Text 5"/>
+          <p:cNvSpPr txBox="1"/>
+          <p:nvPr/>
+        </p:nvSpPr>
+        <p:spPr>
+          <a:xfrm>
+            <a:off x="8302752" y="2862072"/>
+            <a:ext cx="2962656" cy="841248"/>
+          </a:xfrm>
+          <a:prstGeom prst="rect">
+            <a:avLst/>
+          </a:prstGeom>
+          <a:noFill/>
+          <a:ln/>
+        </p:spPr>
+        <p:txBody>
+          <a:bodyPr wrap="square" lIns="0" tIns="0" rIns="0" bIns="0" rtlCol="0" anchor="ctr"/>
+          <a:lstStyle/>
+          <a:p>
+            <a:pPr rtl="1" algn="ctr" indent="0" marL="0">
+              <a:lnSpc>
+                <a:spcPct val="128000"/>
+              </a:lnSpc>
+              <a:buNone/>
+            </a:pPr>
+            <a:r>
+              <a:rPr lang="en-US" sz="1100" dirty="0">
+                <a:solidFill>
+                  <a:srgbClr val="78716C"/>
+                </a:solidFill>
+                <a:latin typeface="Arial" pitchFamily="34" charset="0"/>
+                <a:ea typeface="Arial" pitchFamily="34" charset="-122"/>
+                <a:cs typeface="Arial" pitchFamily="34" charset="-120"/>
+              </a:rPr>
+              <a:t>مقابل 3.87 للمطاعم. ثلاث عزائم بيوت فقط، وكلها في قمة السجل. الخلاصة: بيوتكم أطيب من مطاعم الرياض</a:t>
+            </a:r>
+            <a:endParaRPr lang="en-US" sz="1100" dirty="0"/>
+          </a:p>
+        </p:txBody>
+      </p:sp>
+      <p:sp>
+        <p:nvSpPr>
+          <p:cNvPr id="8" name="Shape 6"/>
+          <p:cNvSpPr/>
+          <p:nvPr/>
+        </p:nvSpPr>
+        <p:spPr>
+          <a:xfrm>
+            <a:off x="4343400" y="1691640"/>
+            <a:ext cx="3474720" cy="2121408"/>
+          </a:xfrm>
+          <a:prstGeom prst="roundRect">
+            <a:avLst>
+              <a:gd name="adj" fmla="val 3879"/>
+            </a:avLst>
+          </a:prstGeom>
+          <a:solidFill>
+            <a:srgbClr val="E0F2FE"/>
+          </a:solidFill>
+          <a:ln w="12700">
+            <a:solidFill>
+              <a:srgbClr val="E7E5E4"/>
+            </a:solidFill>
+            <a:prstDash val="solid"/>
+          </a:ln>
+          <a:effectLst>
+            <a:outerShdw sx="100000" sy="100000" kx="0" ky="0" algn="bl" rotWithShape="0" blurRad="101600" dist="12700" dir="5400000">
+              <a:srgbClr val="000000">
+                <a:alpha val="7000"/>
+              </a:srgbClr>
+            </a:outerShdw>
+          </a:effectLst>
+        </p:spPr>
+      </p:sp>
+      <p:sp>
+        <p:nvSpPr>
+          <p:cNvPr id="9" name="Text 7"/>
+          <p:cNvSpPr txBox="1"/>
+          <p:nvPr/>
+        </p:nvSpPr>
+        <p:spPr>
+          <a:xfrm>
+            <a:off x="4572000" y="1892808"/>
+            <a:ext cx="3017520" cy="566928"/>
+          </a:xfrm>
+          <a:prstGeom prst="rect">
+            <a:avLst/>
+          </a:prstGeom>
+          <a:noFill/>
+          <a:ln/>
+        </p:spPr>
+        <p:txBody>
+          <a:bodyPr wrap="square" lIns="0" tIns="0" rIns="0" bIns="0" rtlCol="0" anchor="ctr"/>
+          <a:lstStyle/>
+          <a:p>
+            <a:pPr algn="ctr" indent="0" marL="0">
+              <a:buNone/>
+            </a:pPr>
+            <a:r>
+              <a:rPr lang="en-US" sz="2400" b="1" dirty="0">
+                <a:solidFill>
+                  <a:srgbClr val="0284C7"/>
+                </a:solidFill>
+                <a:latin typeface="Arial" pitchFamily="34" charset="0"/>
+                <a:ea typeface="Arial" pitchFamily="34" charset="-122"/>
+                <a:cs typeface="Arial" pitchFamily="34" charset="-120"/>
+              </a:rPr>
+              <a:t>الجمعة</a:t>
+            </a:r>
+            <a:endParaRPr lang="en-US" sz="2400" dirty="0"/>
+          </a:p>
+        </p:txBody>
+      </p:sp>
+      <p:sp>
+        <p:nvSpPr>
+          <p:cNvPr id="10" name="Text 8"/>
+          <p:cNvSpPr txBox="1"/>
+          <p:nvPr/>
+        </p:nvSpPr>
+        <p:spPr>
+          <a:xfrm>
+            <a:off x="4572000" y="2478024"/>
+            <a:ext cx="3017520" cy="329184"/>
+          </a:xfrm>
+          <a:prstGeom prst="rect">
+            <a:avLst/>
+          </a:prstGeom>
+          <a:noFill/>
+          <a:ln/>
+        </p:spPr>
+        <p:txBody>
+          <a:bodyPr wrap="square" lIns="0" tIns="0" rIns="0" bIns="0" rtlCol="0" anchor="ctr"/>
+          <a:lstStyle/>
+          <a:p>
+            <a:pPr algn="ctr" indent="0" marL="0">
+              <a:buNone/>
+            </a:pPr>
+            <a:r>
+              <a:rPr lang="en-US" sz="1400" b="1" dirty="0">
+                <a:solidFill>
+                  <a:srgbClr val="292524"/>
+                </a:solidFill>
+                <a:latin typeface="Arial" pitchFamily="34" charset="0"/>
+                <a:ea typeface="Arial" pitchFamily="34" charset="-122"/>
+                <a:cs typeface="Arial" pitchFamily="34" charset="-120"/>
+              </a:rPr>
+              <a:t>أفضل من الخميس</a:t>
+            </a:r>
+            <a:endParaRPr lang="en-US" sz="1400" dirty="0"/>
+          </a:p>
+        </p:txBody>
+      </p:sp>
+      <p:sp>
+        <p:nvSpPr>
+          <p:cNvPr id="11" name="Text 9"/>
+          <p:cNvSpPr txBox="1"/>
+          <p:nvPr/>
+        </p:nvSpPr>
+        <p:spPr>
+          <a:xfrm>
+            <a:off x="4599432" y="2862072"/>
+            <a:ext cx="2962656" cy="841248"/>
+          </a:xfrm>
+          <a:prstGeom prst="rect">
+            <a:avLst/>
+          </a:prstGeom>
+          <a:noFill/>
+          <a:ln/>
+        </p:spPr>
+        <p:txBody>
+          <a:bodyPr wrap="square" lIns="0" tIns="0" rIns="0" bIns="0" rtlCol="0" anchor="ctr"/>
+          <a:lstStyle/>
+          <a:p>
+            <a:pPr rtl="1" algn="ctr" indent="0" marL="0">
+              <a:lnSpc>
+                <a:spcPct val="128000"/>
+              </a:lnSpc>
+              <a:buNone/>
+            </a:pPr>
+            <a:r>
+              <a:rPr lang="en-US" sz="1100" dirty="0">
+                <a:solidFill>
+                  <a:srgbClr val="78716C"/>
+                </a:solidFill>
+                <a:latin typeface="Arial" pitchFamily="34" charset="0"/>
+                <a:ea typeface="Arial" pitchFamily="34" charset="-122"/>
+                <a:cs typeface="Arial" pitchFamily="34" charset="-120"/>
+              </a:rPr>
+              <a:t>4.15 مقابل 3.94. اسم المجموعة «ملك الخميس» ويومكم الأحلى هو الجمعة. نفكّر في تغيير الاسم</a:t>
+            </a:r>
+            <a:endParaRPr lang="en-US" sz="1100" dirty="0"/>
+          </a:p>
+        </p:txBody>
+      </p:sp>
+      <p:sp>
+        <p:nvSpPr>
+          <p:cNvPr id="12" name="Shape 10"/>
+          <p:cNvSpPr/>
+          <p:nvPr/>
+        </p:nvSpPr>
+        <p:spPr>
+          <a:xfrm>
+            <a:off x="640080" y="1691640"/>
+            <a:ext cx="3474720" cy="2121408"/>
+          </a:xfrm>
+          <a:prstGeom prst="roundRect">
+            <a:avLst>
+              <a:gd name="adj" fmla="val 3879"/>
+            </a:avLst>
+          </a:prstGeom>
+          <a:solidFill>
+            <a:srgbClr val="FEF3C7"/>
+          </a:solidFill>
+          <a:ln w="12700">
+            <a:solidFill>
+              <a:srgbClr val="E7E5E4"/>
+            </a:solidFill>
+            <a:prstDash val="solid"/>
+          </a:ln>
+          <a:effectLst>
+            <a:outerShdw sx="100000" sy="100000" kx="0" ky="0" algn="bl" rotWithShape="0" blurRad="101600" dist="12700" dir="5400000">
+              <a:srgbClr val="000000">
+                <a:alpha val="7000"/>
+              </a:srgbClr>
+            </a:outerShdw>
+          </a:effectLst>
+        </p:spPr>
+      </p:sp>
+      <p:sp>
+        <p:nvSpPr>
+          <p:cNvPr id="13" name="Text 11"/>
+          <p:cNvSpPr txBox="1"/>
+          <p:nvPr/>
+        </p:nvSpPr>
+        <p:spPr>
+          <a:xfrm>
+            <a:off x="868680" y="1892808"/>
+            <a:ext cx="3017520" cy="566928"/>
+          </a:xfrm>
+          <a:prstGeom prst="rect">
+            <a:avLst/>
+          </a:prstGeom>
+          <a:noFill/>
+          <a:ln/>
+        </p:spPr>
+        <p:txBody>
+          <a:bodyPr wrap="square" lIns="0" tIns="0" rIns="0" bIns="0" rtlCol="0" anchor="ctr"/>
+          <a:lstStyle/>
+          <a:p>
+            <a:pPr algn="ctr" indent="0" marL="0">
+              <a:buNone/>
+            </a:pPr>
+            <a:r>
+              <a:rPr lang="en-US" sz="3400" b="1" dirty="0">
+                <a:solidFill>
+                  <a:srgbClr val="F59E0B"/>
+                </a:solidFill>
+                <a:latin typeface="Arial" pitchFamily="34" charset="0"/>
+                <a:ea typeface="Arial" pitchFamily="34" charset="-122"/>
+                <a:cs typeface="Arial" pitchFamily="34" charset="-120"/>
+              </a:rPr>
+              <a:t>81%</a:t>
+            </a:r>
+            <a:endParaRPr lang="en-US" sz="3400" dirty="0"/>
+          </a:p>
+        </p:txBody>
+      </p:sp>
+      <p:sp>
+        <p:nvSpPr>
+          <p:cNvPr id="14" name="Text 12"/>
+          <p:cNvSpPr txBox="1"/>
+          <p:nvPr/>
+        </p:nvSpPr>
+        <p:spPr>
+          <a:xfrm>
+            <a:off x="868680" y="2478024"/>
+            <a:ext cx="3017520" cy="329184"/>
+          </a:xfrm>
+          <a:prstGeom prst="rect">
+            <a:avLst/>
+          </a:prstGeom>
+          <a:noFill/>
+          <a:ln/>
+        </p:spPr>
+        <p:txBody>
+          <a:bodyPr wrap="square" lIns="0" tIns="0" rIns="0" bIns="0" rtlCol="0" anchor="ctr"/>
+          <a:lstStyle/>
+          <a:p>
+            <a:pPr algn="ctr" indent="0" marL="0">
+              <a:buNone/>
+            </a:pPr>
+            <a:r>
+              <a:rPr lang="en-US" sz="1400" b="1" dirty="0">
+                <a:solidFill>
+                  <a:srgbClr val="292524"/>
+                </a:solidFill>
+                <a:latin typeface="Arial" pitchFamily="34" charset="0"/>
+                <a:ea typeface="Arial" pitchFamily="34" charset="-122"/>
+                <a:cs typeface="Arial" pitchFamily="34" charset="-120"/>
+              </a:rPr>
+              <a:t>من أصوات شوكا خمسات</a:t>
+            </a:r>
+            <a:endParaRPr lang="en-US" sz="1400" dirty="0"/>
+          </a:p>
+        </p:txBody>
+      </p:sp>
+      <p:sp>
+        <p:nvSpPr>
+          <p:cNvPr id="15" name="Text 13"/>
+          <p:cNvSpPr txBox="1"/>
+          <p:nvPr/>
+        </p:nvSpPr>
+        <p:spPr>
+          <a:xfrm>
+            <a:off x="896112" y="2862072"/>
+            <a:ext cx="2962656" cy="841248"/>
+          </a:xfrm>
+          <a:prstGeom prst="rect">
+            <a:avLst/>
+          </a:prstGeom>
+          <a:noFill/>
+          <a:ln/>
+        </p:spPr>
+        <p:txBody>
+          <a:bodyPr wrap="square" lIns="0" tIns="0" rIns="0" bIns="0" rtlCol="0" anchor="ctr"/>
+          <a:lstStyle/>
+          <a:p>
+            <a:pPr rtl="1" algn="ctr" indent="0" marL="0">
+              <a:lnSpc>
+                <a:spcPct val="128000"/>
+              </a:lnSpc>
+              <a:buNone/>
+            </a:pPr>
+            <a:r>
+              <a:rPr lang="en-US" sz="1100" dirty="0">
+                <a:solidFill>
+                  <a:srgbClr val="78716C"/>
+                </a:solidFill>
+                <a:latin typeface="Arial" pitchFamily="34" charset="0"/>
+                <a:ea typeface="Arial" pitchFamily="34" charset="-122"/>
+                <a:cs typeface="Arial" pitchFamily="34" charset="-120"/>
+              </a:rPr>
+              <a:t>العميد لم يمنح درجة 3 ولا مرة في تاريخه — ثلاث عشرة خمسة من ست عشرة. تقييم أم مجاملة؟</a:t>
+            </a:r>
+            <a:endParaRPr lang="en-US" sz="1100" dirty="0"/>
+          </a:p>
+        </p:txBody>
+      </p:sp>
+      <p:sp>
+        <p:nvSpPr>
+          <p:cNvPr id="16" name="Shape 14"/>
+          <p:cNvSpPr/>
+          <p:nvPr/>
+        </p:nvSpPr>
+        <p:spPr>
+          <a:xfrm>
+            <a:off x="8046720" y="4069080"/>
+            <a:ext cx="3474720" cy="2121408"/>
+          </a:xfrm>
+          <a:prstGeom prst="roundRect">
+            <a:avLst>
+              <a:gd name="adj" fmla="val 3879"/>
+            </a:avLst>
+          </a:prstGeom>
+          <a:solidFill>
+            <a:srgbClr val="FFE4E6"/>
+          </a:solidFill>
+          <a:ln w="12700">
+            <a:solidFill>
+              <a:srgbClr val="E7E5E4"/>
+            </a:solidFill>
+            <a:prstDash val="solid"/>
+          </a:ln>
+          <a:effectLst>
+            <a:outerShdw sx="100000" sy="100000" kx="0" ky="0" algn="bl" rotWithShape="0" blurRad="101600" dist="12700" dir="5400000">
+              <a:srgbClr val="000000">
+                <a:alpha val="7000"/>
+              </a:srgbClr>
+            </a:outerShdw>
+          </a:effectLst>
+        </p:spPr>
+      </p:sp>
+      <p:sp>
+        <p:nvSpPr>
+          <p:cNvPr id="17" name="Text 15"/>
+          <p:cNvSpPr txBox="1"/>
+          <p:nvPr/>
+        </p:nvSpPr>
+        <p:spPr>
+          <a:xfrm>
+            <a:off x="8275320" y="4270248"/>
+            <a:ext cx="3017520" cy="566928"/>
+          </a:xfrm>
+          <a:prstGeom prst="rect">
+            <a:avLst/>
+          </a:prstGeom>
+          <a:noFill/>
+          <a:ln/>
+        </p:spPr>
+        <p:txBody>
+          <a:bodyPr wrap="square" lIns="0" tIns="0" rIns="0" bIns="0" rtlCol="0" anchor="ctr"/>
+          <a:lstStyle/>
+          <a:p>
+            <a:pPr algn="ctr" indent="0" marL="0">
+              <a:buNone/>
+            </a:pPr>
+            <a:r>
+              <a:rPr lang="en-US" sz="3400" b="1" dirty="0">
+                <a:solidFill>
+                  <a:srgbClr val="E11D48"/>
+                </a:solidFill>
+                <a:latin typeface="Arial" pitchFamily="34" charset="0"/>
+                <a:ea typeface="Arial" pitchFamily="34" charset="-122"/>
+                <a:cs typeface="Arial" pitchFamily="34" charset="-120"/>
+              </a:rPr>
+              <a:t>14</a:t>
+            </a:r>
+            <a:endParaRPr lang="en-US" sz="3400" dirty="0"/>
+          </a:p>
+        </p:txBody>
+      </p:sp>
+      <p:sp>
+        <p:nvSpPr>
+          <p:cNvPr id="18" name="Text 16"/>
+          <p:cNvSpPr txBox="1"/>
+          <p:nvPr/>
+        </p:nvSpPr>
+        <p:spPr>
+          <a:xfrm>
+            <a:off x="8275320" y="4855464"/>
+            <a:ext cx="3017520" cy="329184"/>
+          </a:xfrm>
+          <a:prstGeom prst="rect">
+            <a:avLst/>
+          </a:prstGeom>
+          <a:noFill/>
+          <a:ln/>
+        </p:spPr>
+        <p:txBody>
+          <a:bodyPr wrap="square" lIns="0" tIns="0" rIns="0" bIns="0" rtlCol="0" anchor="ctr"/>
+          <a:lstStyle/>
+          <a:p>
+            <a:pPr algn="ctr" indent="0" marL="0">
+              <a:buNone/>
+            </a:pPr>
+            <a:r>
+              <a:rPr lang="en-US" sz="1400" b="1" dirty="0">
+                <a:solidFill>
+                  <a:srgbClr val="292524"/>
+                </a:solidFill>
+                <a:latin typeface="Arial" pitchFamily="34" charset="0"/>
+                <a:ea typeface="Arial" pitchFamily="34" charset="-122"/>
+                <a:cs typeface="Arial" pitchFamily="34" charset="-120"/>
+              </a:rPr>
+              <a:t>اعتذار لنواف</a:t>
+            </a:r>
+            <a:endParaRPr lang="en-US" sz="1400" dirty="0"/>
+          </a:p>
+        </p:txBody>
+      </p:sp>
+      <p:sp>
+        <p:nvSpPr>
+          <p:cNvPr id="19" name="Text 17"/>
+          <p:cNvSpPr txBox="1"/>
+          <p:nvPr/>
+        </p:nvSpPr>
+        <p:spPr>
+          <a:xfrm>
+            <a:off x="8302752" y="5239512"/>
+            <a:ext cx="2962656" cy="841248"/>
+          </a:xfrm>
+          <a:prstGeom prst="rect">
+            <a:avLst/>
+          </a:prstGeom>
+          <a:noFill/>
+          <a:ln/>
+        </p:spPr>
+        <p:txBody>
+          <a:bodyPr wrap="square" lIns="0" tIns="0" rIns="0" bIns="0" rtlCol="0" anchor="ctr"/>
+          <a:lstStyle/>
+          <a:p>
+            <a:pPr rtl="1" algn="ctr" indent="0" marL="0">
+              <a:lnSpc>
+                <a:spcPct val="128000"/>
+              </a:lnSpc>
+              <a:buNone/>
+            </a:pPr>
+            <a:r>
+              <a:rPr lang="en-US" sz="1100" dirty="0">
+                <a:solidFill>
+                  <a:srgbClr val="78716C"/>
+                </a:solidFill>
+                <a:latin typeface="Arial" pitchFamily="34" charset="0"/>
+                <a:ea typeface="Arial" pitchFamily="34" charset="-122"/>
+                <a:cs typeface="Arial" pitchFamily="34" charset="-120"/>
+              </a:rPr>
+              <a:t>ضعف أي عضو آخر (طلال وحكير 6 لكل واحد). حضوره نادر، لكن أثر غيابه على الترتيب ليس نادراً</a:t>
+            </a:r>
+            <a:endParaRPr lang="en-US" sz="1100" dirty="0"/>
+          </a:p>
+        </p:txBody>
+      </p:sp>
+      <p:sp>
+        <p:nvSpPr>
+          <p:cNvPr id="20" name="Shape 18"/>
+          <p:cNvSpPr/>
+          <p:nvPr/>
+        </p:nvSpPr>
+        <p:spPr>
+          <a:xfrm>
+            <a:off x="4343400" y="4069080"/>
+            <a:ext cx="3474720" cy="2121408"/>
+          </a:xfrm>
+          <a:prstGeom prst="roundRect">
+            <a:avLst>
+              <a:gd name="adj" fmla="val 3879"/>
+            </a:avLst>
+          </a:prstGeom>
+          <a:solidFill>
+            <a:srgbClr val="EDE9FE"/>
+          </a:solidFill>
+          <a:ln w="12700">
+            <a:solidFill>
+              <a:srgbClr val="E7E5E4"/>
+            </a:solidFill>
+            <a:prstDash val="solid"/>
+          </a:ln>
+          <a:effectLst>
+            <a:outerShdw sx="100000" sy="100000" kx="0" ky="0" algn="bl" rotWithShape="0" blurRad="101600" dist="12700" dir="5400000">
+              <a:srgbClr val="000000">
+                <a:alpha val="7000"/>
+              </a:srgbClr>
+            </a:outerShdw>
+          </a:effectLst>
+        </p:spPr>
+      </p:sp>
+      <p:sp>
+        <p:nvSpPr>
+          <p:cNvPr id="21" name="Text 19"/>
+          <p:cNvSpPr txBox="1"/>
+          <p:nvPr/>
+        </p:nvSpPr>
+        <p:spPr>
+          <a:xfrm>
+            <a:off x="4572000" y="4270248"/>
+            <a:ext cx="3017520" cy="566928"/>
+          </a:xfrm>
+          <a:prstGeom prst="rect">
+            <a:avLst/>
+          </a:prstGeom>
+          <a:noFill/>
+          <a:ln/>
+        </p:spPr>
+        <p:txBody>
+          <a:bodyPr wrap="square" lIns="0" tIns="0" rIns="0" bIns="0" rtlCol="0" anchor="ctr"/>
+          <a:lstStyle/>
+          <a:p>
+            <a:pPr algn="ctr" indent="0" marL="0">
+              <a:buNone/>
+            </a:pPr>
+            <a:r>
+              <a:rPr lang="en-US" sz="3400" b="1" dirty="0">
+                <a:solidFill>
+                  <a:srgbClr val="7C3AED"/>
+                </a:solidFill>
+                <a:latin typeface="Arial" pitchFamily="34" charset="0"/>
+                <a:ea typeface="Arial" pitchFamily="34" charset="-122"/>
+                <a:cs typeface="Arial" pitchFamily="34" charset="-120"/>
+              </a:rPr>
+              <a:t>80%</a:t>
+            </a:r>
+            <a:endParaRPr lang="en-US" sz="3400" dirty="0"/>
+          </a:p>
+        </p:txBody>
+      </p:sp>
+      <p:sp>
+        <p:nvSpPr>
+          <p:cNvPr id="22" name="Text 20"/>
+          <p:cNvSpPr txBox="1"/>
+          <p:nvPr/>
+        </p:nvSpPr>
+        <p:spPr>
+          <a:xfrm>
+            <a:off x="4572000" y="4855464"/>
+            <a:ext cx="3017520" cy="329184"/>
+          </a:xfrm>
+          <a:prstGeom prst="rect">
+            <a:avLst/>
+          </a:prstGeom>
+          <a:noFill/>
+          <a:ln/>
+        </p:spPr>
+        <p:txBody>
+          <a:bodyPr wrap="square" lIns="0" tIns="0" rIns="0" bIns="0" rtlCol="0" anchor="ctr"/>
+          <a:lstStyle/>
+          <a:p>
+            <a:pPr algn="ctr" indent="0" marL="0">
+              <a:buNone/>
+            </a:pPr>
+            <a:r>
+              <a:rPr lang="en-US" sz="1400" b="1" dirty="0">
+                <a:solidFill>
+                  <a:srgbClr val="292524"/>
+                </a:solidFill>
+                <a:latin typeface="Arial" pitchFamily="34" charset="0"/>
+                <a:ea typeface="Arial" pitchFamily="34" charset="-122"/>
+                <a:cs typeface="Arial" pitchFamily="34" charset="-120"/>
+              </a:rPr>
+              <a:t>من المطاعم المكرّرة نزلت</a:t>
+            </a:r>
+            <a:endParaRPr lang="en-US" sz="1400" dirty="0"/>
+          </a:p>
+        </p:txBody>
+      </p:sp>
+      <p:sp>
+        <p:nvSpPr>
+          <p:cNvPr id="23" name="Text 21"/>
+          <p:cNvSpPr txBox="1"/>
+          <p:nvPr/>
+        </p:nvSpPr>
+        <p:spPr>
+          <a:xfrm>
+            <a:off x="4599432" y="5239512"/>
+            <a:ext cx="2962656" cy="841248"/>
+          </a:xfrm>
+          <a:prstGeom prst="rect">
+            <a:avLst/>
+          </a:prstGeom>
+          <a:noFill/>
+          <a:ln/>
+        </p:spPr>
+        <p:txBody>
+          <a:bodyPr wrap="square" lIns="0" tIns="0" rIns="0" bIns="0" rtlCol="0" anchor="ctr"/>
+          <a:lstStyle/>
+          <a:p>
+            <a:pPr rtl="1" algn="ctr" indent="0" marL="0">
+              <a:lnSpc>
+                <a:spcPct val="128000"/>
+              </a:lnSpc>
+              <a:buNone/>
+            </a:pPr>
+            <a:r>
+              <a:rPr lang="en-US" sz="1100" dirty="0">
+                <a:solidFill>
+                  <a:srgbClr val="78716C"/>
+                </a:solidFill>
+                <a:latin typeface="Arial" pitchFamily="34" charset="0"/>
+                <a:ea typeface="Arial" pitchFamily="34" charset="-122"/>
+                <a:cs typeface="Arial" pitchFamily="34" charset="-120"/>
+              </a:rPr>
+              <a:t>أربعة من خمسة. Buffalo هبط من 4.67 إلى 3.25، وكوجة من 4.60 إلى 3.60. التكرار يقتل الحماس</a:t>
+            </a:r>
+            <a:endParaRPr lang="en-US" sz="1100" dirty="0"/>
+          </a:p>
+        </p:txBody>
+      </p:sp>
+      <p:sp>
+        <p:nvSpPr>
+          <p:cNvPr id="24" name="Shape 22"/>
+          <p:cNvSpPr/>
+          <p:nvPr/>
+        </p:nvSpPr>
+        <p:spPr>
+          <a:xfrm>
+            <a:off x="640080" y="4069080"/>
+            <a:ext cx="3474720" cy="2121408"/>
+          </a:xfrm>
+          <a:prstGeom prst="roundRect">
+            <a:avLst>
+              <a:gd name="adj" fmla="val 3879"/>
+            </a:avLst>
+          </a:prstGeom>
+          <a:solidFill>
+            <a:srgbClr val="FFE4E6"/>
+          </a:solidFill>
+          <a:ln w="12700">
+            <a:solidFill>
+              <a:srgbClr val="E7E5E4"/>
+            </a:solidFill>
+            <a:prstDash val="solid"/>
+          </a:ln>
+          <a:effectLst>
+            <a:outerShdw sx="100000" sy="100000" kx="0" ky="0" algn="bl" rotWithShape="0" blurRad="101600" dist="12700" dir="5400000">
+              <a:srgbClr val="000000">
+                <a:alpha val="7000"/>
+              </a:srgbClr>
+            </a:outerShdw>
+          </a:effectLst>
+        </p:spPr>
+      </p:sp>
+      <p:sp>
+        <p:nvSpPr>
+          <p:cNvPr id="25" name="Text 23"/>
+          <p:cNvSpPr txBox="1"/>
+          <p:nvPr/>
+        </p:nvSpPr>
+        <p:spPr>
+          <a:xfrm>
+            <a:off x="868680" y="4270248"/>
+            <a:ext cx="3017520" cy="566928"/>
+          </a:xfrm>
+          <a:prstGeom prst="rect">
+            <a:avLst/>
+          </a:prstGeom>
+          <a:noFill/>
+          <a:ln/>
+        </p:spPr>
+        <p:txBody>
+          <a:bodyPr wrap="square" lIns="0" tIns="0" rIns="0" bIns="0" rtlCol="0" anchor="ctr"/>
+          <a:lstStyle/>
+          <a:p>
+            <a:pPr algn="ctr" indent="0" marL="0">
+              <a:buNone/>
+            </a:pPr>
+            <a:r>
+              <a:rPr lang="en-US" sz="3400" b="1" dirty="0">
+                <a:solidFill>
+                  <a:srgbClr val="E11D48"/>
+                </a:solidFill>
+                <a:latin typeface="Arial" pitchFamily="34" charset="0"/>
+                <a:ea typeface="Arial" pitchFamily="34" charset="-122"/>
+                <a:cs typeface="Arial" pitchFamily="34" charset="-120"/>
+              </a:rPr>
+              <a:t>3.56</a:t>
+            </a:r>
+            <a:endParaRPr lang="en-US" sz="3400" dirty="0"/>
+          </a:p>
+        </p:txBody>
+      </p:sp>
+      <p:sp>
+        <p:nvSpPr>
+          <p:cNvPr id="26" name="Text 24"/>
+          <p:cNvSpPr txBox="1"/>
+          <p:nvPr/>
+        </p:nvSpPr>
+        <p:spPr>
+          <a:xfrm>
+            <a:off x="868680" y="4855464"/>
+            <a:ext cx="3017520" cy="329184"/>
+          </a:xfrm>
+          <a:prstGeom prst="rect">
+            <a:avLst/>
+          </a:prstGeom>
+          <a:noFill/>
+          <a:ln/>
+        </p:spPr>
+        <p:txBody>
+          <a:bodyPr wrap="square" lIns="0" tIns="0" rIns="0" bIns="0" rtlCol="0" anchor="ctr"/>
+          <a:lstStyle/>
+          <a:p>
+            <a:pPr algn="ctr" indent="0" marL="0">
+              <a:buNone/>
+            </a:pPr>
+            <a:r>
+              <a:rPr lang="en-US" sz="1400" b="1" dirty="0">
+                <a:solidFill>
+                  <a:srgbClr val="292524"/>
+                </a:solidFill>
+                <a:latin typeface="Arial" pitchFamily="34" charset="0"/>
+                <a:ea typeface="Arial" pitchFamily="34" charset="-122"/>
+                <a:cs typeface="Arial" pitchFamily="34" charset="-120"/>
+              </a:rPr>
+              <a:t>معدّل الدورة الخامسة</a:t>
+            </a:r>
+            <a:endParaRPr lang="en-US" sz="1400" dirty="0"/>
+          </a:p>
+        </p:txBody>
+      </p:sp>
+      <p:sp>
+        <p:nvSpPr>
+          <p:cNvPr id="27" name="Text 25"/>
+          <p:cNvSpPr txBox="1"/>
+          <p:nvPr/>
+        </p:nvSpPr>
+        <p:spPr>
+          <a:xfrm>
+            <a:off x="896112" y="5239512"/>
+            <a:ext cx="2962656" cy="841248"/>
+          </a:xfrm>
+          <a:prstGeom prst="rect">
+            <a:avLst/>
+          </a:prstGeom>
+          <a:noFill/>
+          <a:ln/>
+        </p:spPr>
+        <p:txBody>
+          <a:bodyPr wrap="square" lIns="0" tIns="0" rIns="0" bIns="0" rtlCol="0" anchor="ctr"/>
+          <a:lstStyle/>
+          <a:p>
+            <a:pPr rtl="1" algn="ctr" indent="0" marL="0">
+              <a:lnSpc>
+                <a:spcPct val="128000"/>
+              </a:lnSpc>
+              <a:buNone/>
+            </a:pPr>
+            <a:r>
+              <a:rPr lang="en-US" sz="1100" dirty="0">
+                <a:solidFill>
+                  <a:srgbClr val="78716C"/>
+                </a:solidFill>
+                <a:latin typeface="Arial" pitchFamily="34" charset="0"/>
+                <a:ea typeface="Arial" pitchFamily="34" charset="-122"/>
+                <a:cs typeface="Arial" pitchFamily="34" charset="-120"/>
+              </a:rPr>
+              <a:t>كان 4.00 في الثانية والثالثة. ليست المطاعم التي ساءت — نحن الذين صرنا أقسى</a:t>
+            </a:r>
+            <a:endParaRPr lang="en-US" sz="1100" dirty="0"/>
+          </a:p>
+        </p:txBody>
+      </p:sp>
+    </p:spTree>
+  </p:cSld>
+  <p:clrMapOvr>
+    <a:masterClrMapping/>
+  </p:clrMapOvr>
+</p:sld>
+</file>
+
+<file path=ppt/slides/slide14.xml><?xml version="1.0" encoding="utf-8"?>
+<p:sld xmlns:a="http://schemas.openxmlformats.org/drawingml/2006/main" xmlns:r="http://schemas.openxmlformats.org/officeDocument/2006/relationships" xmlns:p="http://schemas.openxmlformats.org/presentationml/2006/main">
+  <p:cSld name="Slide 14">
+    <p:bg>
+      <p:bgPr>
+        <a:solidFill>
           <a:srgbClr val="1C1917"/>
         </a:solidFill>
       </p:bgPr>
@@ -6894,132 +8017,6 @@
           </a:p>
         </p:txBody>
       </p:sp>
-    </p:spTree>
-  </p:cSld>
-  <p:clrMapOvr>
-    <a:masterClrMapping/>
-  </p:clrMapOvr>
-</p:sld>
-</file>
-
-<file path=ppt/slides/slide14.xml><?xml version="1.0" encoding="utf-8"?>
-<p:sld xmlns:a="http://schemas.openxmlformats.org/drawingml/2006/main" xmlns:r="http://schemas.openxmlformats.org/officeDocument/2006/relationships" xmlns:p="http://schemas.openxmlformats.org/presentationml/2006/main">
-  <p:cSld name="Slide 14">
-    <p:bg>
-      <p:bgPr>
-        <a:solidFill>
-          <a:srgbClr val="FAF7F2"/>
-        </a:solidFill>
-      </p:bgPr>
-    </p:bg>
-    <p:spTree>
-      <p:nvGrpSpPr>
-        <p:cNvPr id="1" name=""/>
-        <p:cNvGrpSpPr/>
-        <p:nvPr/>
-      </p:nvGrpSpPr>
-      <p:grpSpPr>
-        <a:xfrm>
-          <a:off x="0" y="0"/>
-          <a:ext cx="0" cy="0"/>
-          <a:chOff x="0" y="0"/>
-          <a:chExt cx="0" cy="0"/>
-        </a:xfrm>
-      </p:grpSpPr>
-      <p:sp>
-        <p:nvSpPr>
-          <p:cNvPr id="2" name="Text 0"/>
-          <p:cNvSpPr txBox="1"/>
-          <p:nvPr/>
-        </p:nvSpPr>
-        <p:spPr>
-          <a:xfrm>
-            <a:off x="640080" y="457200"/>
-            <a:ext cx="10881360" cy="685800"/>
-          </a:xfrm>
-          <a:prstGeom prst="rect">
-            <a:avLst/>
-          </a:prstGeom>
-          <a:noFill/>
-          <a:ln/>
-        </p:spPr>
-        <p:txBody>
-          <a:bodyPr wrap="square" lIns="0" tIns="0" rIns="0" bIns="0" rtlCol="0" anchor="ctr"/>
-          <a:lstStyle/>
-          <a:p>
-            <a:pPr rtl="1" algn="r" indent="0" marL="0">
-              <a:buNone/>
-            </a:pPr>
-            <a:r>
-              <a:rPr lang="en-US" sz="3400" b="1" dirty="0">
-                <a:solidFill>
-                  <a:srgbClr val="292524"/>
-                </a:solidFill>
-                <a:latin typeface="Arial" pitchFamily="34" charset="0"/>
-                <a:ea typeface="Arial" pitchFamily="34" charset="-122"/>
-                <a:cs typeface="Arial" pitchFamily="34" charset="-120"/>
-              </a:rPr>
-              <a:t>الترتيب الحالي</a:t>
-            </a:r>
-            <a:endParaRPr lang="en-US" sz="3400" dirty="0"/>
-          </a:p>
-        </p:txBody>
-      </p:sp>
-      <p:sp>
-        <p:nvSpPr>
-          <p:cNvPr id="3" name="Text 1"/>
-          <p:cNvSpPr txBox="1"/>
-          <p:nvPr/>
-        </p:nvSpPr>
-        <p:spPr>
-          <a:xfrm>
-            <a:off x="640080" y="1097280"/>
-            <a:ext cx="10881360" cy="365760"/>
-          </a:xfrm>
-          <a:prstGeom prst="rect">
-            <a:avLst/>
-          </a:prstGeom>
-          <a:noFill/>
-          <a:ln/>
-        </p:spPr>
-        <p:txBody>
-          <a:bodyPr wrap="square" lIns="0" tIns="0" rIns="0" bIns="0" rtlCol="0" anchor="ctr"/>
-          <a:lstStyle/>
-          <a:p>
-            <a:pPr rtl="1" algn="r" indent="0" marL="0">
-              <a:buNone/>
-            </a:pPr>
-            <a:r>
-              <a:rPr lang="en-US" sz="1300" dirty="0">
-                <a:solidFill>
-                  <a:srgbClr val="78716C"/>
-                </a:solidFill>
-                <a:latin typeface="Arial" pitchFamily="34" charset="0"/>
-                <a:ea typeface="Arial" pitchFamily="34" charset="-122"/>
-                <a:cs typeface="Arial" pitchFamily="34" charset="-120"/>
-              </a:rPr>
-              <a:t>معدّلات الدورات المكتملة الأربع</a:t>
-            </a:r>
-            <a:endParaRPr lang="en-US" sz="1300" dirty="0"/>
-          </a:p>
-        </p:txBody>
-      </p:sp>
-      <p:graphicFrame>
-        <p:nvGraphicFramePr>
-          <p:cNvPr id="4" name="Chart 0" descr=""/>
-          <p:cNvGraphicFramePr/>
-          <p:nvPr/>
-        </p:nvGraphicFramePr>
-        <p:xfrm>
-          <a:off x="640080" y="1645920"/>
-          <a:ext cx="10881360" cy="4480560"/>
-        </p:xfrm>
-        <a:graphic xmlns:a="http://schemas.openxmlformats.org/drawingml/2006/main">
-          <a:graphicData uri="http://schemas.openxmlformats.org/drawingml/2006/chart">
-            <c:chart xmlns:c="http://schemas.openxmlformats.org/drawingml/2006/chart" r:id="rId1"/>
-          </a:graphicData>
-        </a:graphic>
-      </p:graphicFrame>
     </p:spTree>
   </p:cSld>
   <p:clrMapOvr>
@@ -7085,7 +8082,7 @@
                 <a:ea typeface="Arial" pitchFamily="34" charset="-122"/>
                 <a:cs typeface="Arial" pitchFamily="34" charset="-120"/>
               </a:rPr>
-              <a:t>دليل الحرب: مطعم الشرفه</a:t>
+              <a:t>الترتيب الحالي</a:t>
             </a:r>
             <a:endParaRPr lang="en-US" sz="3400" dirty="0"/>
           </a:p>
@@ -7124,611 +8121,28 @@
                 <a:ea typeface="Arial" pitchFamily="34" charset="-122"/>
                 <a:cs typeface="Arial" pitchFamily="34" charset="-120"/>
               </a:rPr>
-              <a:t>طلعة طلال في الدورة الخامسة — أدنى تقييم في تاريخ المجموعة</a:t>
+              <a:t>معدّلات الدورات المكتملة الأربع</a:t>
             </a:r>
             <a:endParaRPr lang="en-US" sz="1300" dirty="0"/>
           </a:p>
         </p:txBody>
       </p:sp>
-      <p:sp>
-        <p:nvSpPr>
-          <p:cNvPr id="4" name="Shape 2"/>
-          <p:cNvSpPr/>
-          <p:nvPr/>
-        </p:nvSpPr>
-        <p:spPr>
-          <a:xfrm>
-            <a:off x="640080" y="1691640"/>
-            <a:ext cx="2491740" cy="1737360"/>
-          </a:xfrm>
-          <a:prstGeom prst="roundRect">
-            <a:avLst>
-              <a:gd name="adj" fmla="val 4737"/>
-            </a:avLst>
-          </a:prstGeom>
-          <a:solidFill>
-            <a:srgbClr val="FFFFFF"/>
-          </a:solidFill>
-          <a:ln w="12700">
-            <a:solidFill>
-              <a:srgbClr val="E7E5E4"/>
-            </a:solidFill>
-            <a:prstDash val="solid"/>
-          </a:ln>
-          <a:effectLst>
-            <a:outerShdw sx="100000" sy="100000" kx="0" ky="0" algn="bl" rotWithShape="0" blurRad="101600" dist="12700" dir="5400000">
-              <a:srgbClr val="000000">
-                <a:alpha val="7000"/>
-              </a:srgbClr>
-            </a:outerShdw>
-          </a:effectLst>
-        </p:spPr>
-      </p:sp>
-      <p:sp>
-        <p:nvSpPr>
-          <p:cNvPr id="5" name="Text 3"/>
-          <p:cNvSpPr txBox="1"/>
-          <p:nvPr/>
-        </p:nvSpPr>
-        <p:spPr>
-          <a:xfrm>
-            <a:off x="822960" y="1874520"/>
-            <a:ext cx="2125980" cy="365760"/>
-          </a:xfrm>
-          <a:prstGeom prst="rect">
-            <a:avLst/>
-          </a:prstGeom>
-          <a:noFill/>
-          <a:ln/>
-        </p:spPr>
-        <p:txBody>
-          <a:bodyPr wrap="square" lIns="0" tIns="0" rIns="0" bIns="0" rtlCol="0" anchor="ctr"/>
-          <a:lstStyle/>
-          <a:p>
-            <a:pPr rtl="1" algn="ctr" indent="0" marL="0">
-              <a:buNone/>
-            </a:pPr>
-            <a:r>
-              <a:rPr lang="en-US" sz="1500" b="1" dirty="0">
-                <a:solidFill>
-                  <a:srgbClr val="292524"/>
-                </a:solidFill>
-                <a:latin typeface="Arial" pitchFamily="34" charset="0"/>
-                <a:ea typeface="Arial" pitchFamily="34" charset="-122"/>
-                <a:cs typeface="Arial" pitchFamily="34" charset="-120"/>
-              </a:rPr>
-              <a:t>حكير</a:t>
-            </a:r>
-            <a:endParaRPr lang="en-US" sz="1500" dirty="0"/>
-          </a:p>
-        </p:txBody>
-      </p:sp>
-      <p:sp>
-        <p:nvSpPr>
-          <p:cNvPr id="6" name="Text 4"/>
-          <p:cNvSpPr txBox="1"/>
-          <p:nvPr/>
-        </p:nvSpPr>
-        <p:spPr>
-          <a:xfrm>
-            <a:off x="822960" y="2240280"/>
-            <a:ext cx="2125980" cy="914400"/>
-          </a:xfrm>
-          <a:prstGeom prst="rect">
-            <a:avLst/>
-          </a:prstGeom>
-          <a:noFill/>
-          <a:ln/>
-        </p:spPr>
-        <p:txBody>
-          <a:bodyPr wrap="square" lIns="0" tIns="0" rIns="0" bIns="0" rtlCol="0" anchor="ctr"/>
-          <a:lstStyle/>
-          <a:p>
-            <a:pPr algn="ctr" indent="0" marL="0">
-              <a:buNone/>
-            </a:pPr>
-            <a:r>
-              <a:rPr lang="en-US" sz="4400" b="1" dirty="0">
-                <a:solidFill>
-                  <a:srgbClr val="E11D48"/>
-                </a:solidFill>
-                <a:latin typeface="Arial" pitchFamily="34" charset="0"/>
-                <a:ea typeface="Arial" pitchFamily="34" charset="-122"/>
-                <a:cs typeface="Arial" pitchFamily="34" charset="-120"/>
-              </a:rPr>
-              <a:t>1</a:t>
-            </a:r>
-            <a:endParaRPr lang="en-US" sz="4400" dirty="0"/>
-          </a:p>
-        </p:txBody>
-      </p:sp>
-      <p:sp>
-        <p:nvSpPr>
-          <p:cNvPr id="7" name="Shape 5"/>
-          <p:cNvSpPr/>
-          <p:nvPr/>
-        </p:nvSpPr>
-        <p:spPr>
-          <a:xfrm>
-            <a:off x="3360420" y="1691640"/>
-            <a:ext cx="2491740" cy="1737360"/>
-          </a:xfrm>
-          <a:prstGeom prst="roundRect">
-            <a:avLst>
-              <a:gd name="adj" fmla="val 4737"/>
-            </a:avLst>
-          </a:prstGeom>
-          <a:solidFill>
-            <a:srgbClr val="FFFFFF"/>
-          </a:solidFill>
-          <a:ln w="12700">
-            <a:solidFill>
-              <a:srgbClr val="E7E5E4"/>
-            </a:solidFill>
-            <a:prstDash val="solid"/>
-          </a:ln>
-          <a:effectLst>
-            <a:outerShdw sx="100000" sy="100000" kx="0" ky="0" algn="bl" rotWithShape="0" blurRad="101600" dist="12700" dir="5400000">
-              <a:srgbClr val="000000">
-                <a:alpha val="7000"/>
-              </a:srgbClr>
-            </a:outerShdw>
-          </a:effectLst>
-        </p:spPr>
-      </p:sp>
-      <p:sp>
-        <p:nvSpPr>
-          <p:cNvPr id="8" name="Text 6"/>
-          <p:cNvSpPr txBox="1"/>
-          <p:nvPr/>
-        </p:nvSpPr>
-        <p:spPr>
-          <a:xfrm>
-            <a:off x="3543300" y="1874520"/>
-            <a:ext cx="2125980" cy="365760"/>
-          </a:xfrm>
-          <a:prstGeom prst="rect">
-            <a:avLst/>
-          </a:prstGeom>
-          <a:noFill/>
-          <a:ln/>
-        </p:spPr>
-        <p:txBody>
-          <a:bodyPr wrap="square" lIns="0" tIns="0" rIns="0" bIns="0" rtlCol="0" anchor="ctr"/>
-          <a:lstStyle/>
-          <a:p>
-            <a:pPr rtl="1" algn="ctr" indent="0" marL="0">
-              <a:buNone/>
-            </a:pPr>
-            <a:r>
-              <a:rPr lang="en-US" sz="1500" b="1" dirty="0">
-                <a:solidFill>
-                  <a:srgbClr val="292524"/>
-                </a:solidFill>
-                <a:latin typeface="Arial" pitchFamily="34" charset="0"/>
-                <a:ea typeface="Arial" pitchFamily="34" charset="-122"/>
-                <a:cs typeface="Arial" pitchFamily="34" charset="-120"/>
-              </a:rPr>
-              <a:t>هشام</a:t>
-            </a:r>
-            <a:endParaRPr lang="en-US" sz="1500" dirty="0"/>
-          </a:p>
-        </p:txBody>
-      </p:sp>
-      <p:sp>
-        <p:nvSpPr>
-          <p:cNvPr id="9" name="Text 7"/>
-          <p:cNvSpPr txBox="1"/>
-          <p:nvPr/>
-        </p:nvSpPr>
-        <p:spPr>
-          <a:xfrm>
-            <a:off x="3543300" y="2240280"/>
-            <a:ext cx="2125980" cy="914400"/>
-          </a:xfrm>
-          <a:prstGeom prst="rect">
-            <a:avLst/>
-          </a:prstGeom>
-          <a:noFill/>
-          <a:ln/>
-        </p:spPr>
-        <p:txBody>
-          <a:bodyPr wrap="square" lIns="0" tIns="0" rIns="0" bIns="0" rtlCol="0" anchor="ctr"/>
-          <a:lstStyle/>
-          <a:p>
-            <a:pPr algn="ctr" indent="0" marL="0">
-              <a:buNone/>
-            </a:pPr>
-            <a:r>
-              <a:rPr lang="en-US" sz="4400" b="1" dirty="0">
-                <a:solidFill>
-                  <a:srgbClr val="E11D48"/>
-                </a:solidFill>
-                <a:latin typeface="Arial" pitchFamily="34" charset="0"/>
-                <a:ea typeface="Arial" pitchFamily="34" charset="-122"/>
-                <a:cs typeface="Arial" pitchFamily="34" charset="-120"/>
-              </a:rPr>
-              <a:t>2</a:t>
-            </a:r>
-            <a:endParaRPr lang="en-US" sz="4400" dirty="0"/>
-          </a:p>
-        </p:txBody>
-      </p:sp>
-      <p:sp>
-        <p:nvSpPr>
-          <p:cNvPr id="10" name="Shape 8"/>
-          <p:cNvSpPr/>
-          <p:nvPr/>
-        </p:nvSpPr>
-        <p:spPr>
-          <a:xfrm>
-            <a:off x="6080760" y="1691640"/>
-            <a:ext cx="2491740" cy="1737360"/>
-          </a:xfrm>
-          <a:prstGeom prst="roundRect">
-            <a:avLst>
-              <a:gd name="adj" fmla="val 4737"/>
-            </a:avLst>
-          </a:prstGeom>
-          <a:solidFill>
-            <a:srgbClr val="FFFFFF"/>
-          </a:solidFill>
-          <a:ln w="12700">
-            <a:solidFill>
-              <a:srgbClr val="E7E5E4"/>
-            </a:solidFill>
-            <a:prstDash val="solid"/>
-          </a:ln>
-          <a:effectLst>
-            <a:outerShdw sx="100000" sy="100000" kx="0" ky="0" algn="bl" rotWithShape="0" blurRad="101600" dist="12700" dir="5400000">
-              <a:srgbClr val="000000">
-                <a:alpha val="7000"/>
-              </a:srgbClr>
-            </a:outerShdw>
-          </a:effectLst>
-        </p:spPr>
-      </p:sp>
-      <p:sp>
-        <p:nvSpPr>
-          <p:cNvPr id="11" name="Text 9"/>
-          <p:cNvSpPr txBox="1"/>
-          <p:nvPr/>
-        </p:nvSpPr>
-        <p:spPr>
-          <a:xfrm>
-            <a:off x="6263640" y="1874520"/>
-            <a:ext cx="2125980" cy="365760"/>
-          </a:xfrm>
-          <a:prstGeom prst="rect">
-            <a:avLst/>
-          </a:prstGeom>
-          <a:noFill/>
-          <a:ln/>
-        </p:spPr>
-        <p:txBody>
-          <a:bodyPr wrap="square" lIns="0" tIns="0" rIns="0" bIns="0" rtlCol="0" anchor="ctr"/>
-          <a:lstStyle/>
-          <a:p>
-            <a:pPr rtl="1" algn="ctr" indent="0" marL="0">
-              <a:buNone/>
-            </a:pPr>
-            <a:r>
-              <a:rPr lang="en-US" sz="1500" b="1" dirty="0">
-                <a:solidFill>
-                  <a:srgbClr val="292524"/>
-                </a:solidFill>
-                <a:latin typeface="Arial" pitchFamily="34" charset="0"/>
-                <a:ea typeface="Arial" pitchFamily="34" charset="-122"/>
-                <a:cs typeface="Arial" pitchFamily="34" charset="-120"/>
-              </a:rPr>
-              <a:t>خالد</a:t>
-            </a:r>
-            <a:endParaRPr lang="en-US" sz="1500" dirty="0"/>
-          </a:p>
-        </p:txBody>
-      </p:sp>
-      <p:sp>
-        <p:nvSpPr>
-          <p:cNvPr id="12" name="Text 10"/>
-          <p:cNvSpPr txBox="1"/>
-          <p:nvPr/>
-        </p:nvSpPr>
-        <p:spPr>
-          <a:xfrm>
-            <a:off x="6263640" y="2240280"/>
-            <a:ext cx="2125980" cy="914400"/>
-          </a:xfrm>
-          <a:prstGeom prst="rect">
-            <a:avLst/>
-          </a:prstGeom>
-          <a:noFill/>
-          <a:ln/>
-        </p:spPr>
-        <p:txBody>
-          <a:bodyPr wrap="square" lIns="0" tIns="0" rIns="0" bIns="0" rtlCol="0" anchor="ctr"/>
-          <a:lstStyle/>
-          <a:p>
-            <a:pPr algn="ctr" indent="0" marL="0">
-              <a:buNone/>
-            </a:pPr>
-            <a:r>
-              <a:rPr lang="en-US" sz="4400" b="1" dirty="0">
-                <a:solidFill>
-                  <a:srgbClr val="78716C"/>
-                </a:solidFill>
-                <a:latin typeface="Arial" pitchFamily="34" charset="0"/>
-                <a:ea typeface="Arial" pitchFamily="34" charset="-122"/>
-                <a:cs typeface="Arial" pitchFamily="34" charset="-120"/>
-              </a:rPr>
-              <a:t>3</a:t>
-            </a:r>
-            <a:endParaRPr lang="en-US" sz="4400" dirty="0"/>
-          </a:p>
-        </p:txBody>
-      </p:sp>
-      <p:sp>
-        <p:nvSpPr>
-          <p:cNvPr id="13" name="Shape 11"/>
-          <p:cNvSpPr/>
-          <p:nvPr/>
-        </p:nvSpPr>
-        <p:spPr>
-          <a:xfrm>
-            <a:off x="8801100" y="1691640"/>
-            <a:ext cx="2491740" cy="1737360"/>
-          </a:xfrm>
-          <a:prstGeom prst="roundRect">
-            <a:avLst>
-              <a:gd name="adj" fmla="val 4737"/>
-            </a:avLst>
-          </a:prstGeom>
-          <a:solidFill>
-            <a:srgbClr val="FFFFFF"/>
-          </a:solidFill>
-          <a:ln w="12700">
-            <a:solidFill>
-              <a:srgbClr val="E7E5E4"/>
-            </a:solidFill>
-            <a:prstDash val="solid"/>
-          </a:ln>
-          <a:effectLst>
-            <a:outerShdw sx="100000" sy="100000" kx="0" ky="0" algn="bl" rotWithShape="0" blurRad="101600" dist="12700" dir="5400000">
-              <a:srgbClr val="000000">
-                <a:alpha val="7000"/>
-              </a:srgbClr>
-            </a:outerShdw>
-          </a:effectLst>
-        </p:spPr>
-      </p:sp>
-      <p:sp>
-        <p:nvSpPr>
-          <p:cNvPr id="14" name="Text 12"/>
-          <p:cNvSpPr txBox="1"/>
-          <p:nvPr/>
-        </p:nvSpPr>
-        <p:spPr>
-          <a:xfrm>
-            <a:off x="8983980" y="1874520"/>
-            <a:ext cx="2125980" cy="365760"/>
-          </a:xfrm>
-          <a:prstGeom prst="rect">
-            <a:avLst/>
-          </a:prstGeom>
-          <a:noFill/>
-          <a:ln/>
-        </p:spPr>
-        <p:txBody>
-          <a:bodyPr wrap="square" lIns="0" tIns="0" rIns="0" bIns="0" rtlCol="0" anchor="ctr"/>
-          <a:lstStyle/>
-          <a:p>
-            <a:pPr rtl="1" algn="ctr" indent="0" marL="0">
-              <a:buNone/>
-            </a:pPr>
-            <a:r>
-              <a:rPr lang="en-US" sz="1500" b="1" dirty="0">
-                <a:solidFill>
-                  <a:srgbClr val="292524"/>
-                </a:solidFill>
-                <a:latin typeface="Arial" pitchFamily="34" charset="0"/>
-                <a:ea typeface="Arial" pitchFamily="34" charset="-122"/>
-                <a:cs typeface="Arial" pitchFamily="34" charset="-120"/>
-              </a:rPr>
-              <a:t>شوكا</a:t>
-            </a:r>
-            <a:endParaRPr lang="en-US" sz="1500" dirty="0"/>
-          </a:p>
-        </p:txBody>
-      </p:sp>
-      <p:sp>
-        <p:nvSpPr>
-          <p:cNvPr id="15" name="Text 13"/>
-          <p:cNvSpPr txBox="1"/>
-          <p:nvPr/>
-        </p:nvSpPr>
-        <p:spPr>
-          <a:xfrm>
-            <a:off x="8983980" y="2240280"/>
-            <a:ext cx="2125980" cy="914400"/>
-          </a:xfrm>
-          <a:prstGeom prst="rect">
-            <a:avLst/>
-          </a:prstGeom>
-          <a:noFill/>
-          <a:ln/>
-        </p:spPr>
-        <p:txBody>
-          <a:bodyPr wrap="square" lIns="0" tIns="0" rIns="0" bIns="0" rtlCol="0" anchor="ctr"/>
-          <a:lstStyle/>
-          <a:p>
-            <a:pPr algn="ctr" indent="0" marL="0">
-              <a:buNone/>
-            </a:pPr>
-            <a:r>
-              <a:rPr lang="en-US" sz="4400" b="1" dirty="0">
-                <a:solidFill>
-                  <a:srgbClr val="10B981"/>
-                </a:solidFill>
-                <a:latin typeface="Arial" pitchFamily="34" charset="0"/>
-                <a:ea typeface="Arial" pitchFamily="34" charset="-122"/>
-                <a:cs typeface="Arial" pitchFamily="34" charset="-120"/>
-              </a:rPr>
-              <a:t>5</a:t>
-            </a:r>
-            <a:endParaRPr lang="en-US" sz="4400" dirty="0"/>
-          </a:p>
-        </p:txBody>
-      </p:sp>
-      <p:sp>
-        <p:nvSpPr>
-          <p:cNvPr id="16" name="Shape 14"/>
-          <p:cNvSpPr/>
-          <p:nvPr/>
-        </p:nvSpPr>
-        <p:spPr>
-          <a:xfrm>
-            <a:off x="640080" y="3703320"/>
-            <a:ext cx="10881360" cy="2011680"/>
-          </a:xfrm>
-          <a:prstGeom prst="roundRect">
-            <a:avLst>
-              <a:gd name="adj" fmla="val 4091"/>
-            </a:avLst>
-          </a:prstGeom>
-          <a:solidFill>
-            <a:srgbClr val="FFE4E6"/>
-          </a:solidFill>
-          <a:ln w="12700">
-            <a:solidFill>
-              <a:srgbClr val="E7E5E4"/>
-            </a:solidFill>
-            <a:prstDash val="solid"/>
-          </a:ln>
-          <a:effectLst>
-            <a:outerShdw sx="100000" sy="100000" kx="0" ky="0" algn="bl" rotWithShape="0" blurRad="101600" dist="12700" dir="5400000">
-              <a:srgbClr val="000000">
-                <a:alpha val="7000"/>
-              </a:srgbClr>
-            </a:outerShdw>
-          </a:effectLst>
-        </p:spPr>
-      </p:sp>
-      <p:sp>
-        <p:nvSpPr>
-          <p:cNvPr id="17" name="Text 15"/>
-          <p:cNvSpPr txBox="1"/>
-          <p:nvPr/>
-        </p:nvSpPr>
-        <p:spPr>
-          <a:xfrm>
-            <a:off x="960120" y="3931920"/>
-            <a:ext cx="10241280" cy="457200"/>
-          </a:xfrm>
-          <a:prstGeom prst="rect">
-            <a:avLst/>
-          </a:prstGeom>
-          <a:noFill/>
-          <a:ln/>
-        </p:spPr>
-        <p:txBody>
-          <a:bodyPr wrap="square" lIns="0" tIns="0" rIns="0" bIns="0" rtlCol="0" anchor="ctr"/>
-          <a:lstStyle/>
-          <a:p>
-            <a:pPr rtl="1" algn="r" indent="0" marL="0">
-              <a:buNone/>
-            </a:pPr>
-            <a:r>
-              <a:rPr lang="en-US" sz="2200" b="1" dirty="0">
-                <a:solidFill>
-                  <a:srgbClr val="E11D48"/>
-                </a:solidFill>
-                <a:latin typeface="Arial" pitchFamily="34" charset="0"/>
-                <a:ea typeface="Arial" pitchFamily="34" charset="-122"/>
-                <a:cs typeface="Arial" pitchFamily="34" charset="-120"/>
-              </a:rPr>
-              <a:t>المحصّلة: 2.75</a:t>
-            </a:r>
-            <a:endParaRPr lang="en-US" sz="2200" dirty="0"/>
-          </a:p>
-        </p:txBody>
-      </p:sp>
-      <p:sp>
-        <p:nvSpPr>
-          <p:cNvPr id="18" name="Text 16"/>
-          <p:cNvSpPr txBox="1"/>
-          <p:nvPr/>
-        </p:nvSpPr>
-        <p:spPr>
-          <a:xfrm>
-            <a:off x="960120" y="4434840"/>
-            <a:ext cx="10241280" cy="457200"/>
-          </a:xfrm>
-          <a:prstGeom prst="rect">
-            <a:avLst/>
-          </a:prstGeom>
-          <a:noFill/>
-          <a:ln/>
-        </p:spPr>
-        <p:txBody>
-          <a:bodyPr wrap="square" lIns="0" tIns="0" rIns="0" bIns="0" rtlCol="0" anchor="ctr"/>
-          <a:lstStyle/>
-          <a:p>
-            <a:pPr rtl="1" algn="r" indent="0" marL="0">
-              <a:buNone/>
-            </a:pPr>
-            <a:r>
-              <a:rPr lang="en-US" sz="1350" dirty="0">
-                <a:solidFill>
-                  <a:srgbClr val="292524"/>
-                </a:solidFill>
-                <a:latin typeface="Arial" pitchFamily="34" charset="0"/>
-                <a:ea typeface="Arial" pitchFamily="34" charset="-122"/>
-                <a:cs typeface="Arial" pitchFamily="34" charset="-120"/>
-              </a:rPr>
-              <a:t>طلعة واحدة أنزلت طلال من المركز الرابع إلى الخامس. وسبقتها ماء ورد بالنمط نفسه في الدورة الرابعة.</a:t>
-            </a:r>
-            <a:endParaRPr lang="en-US" sz="1350" dirty="0"/>
-          </a:p>
-        </p:txBody>
-      </p:sp>
-      <p:sp>
-        <p:nvSpPr>
-          <p:cNvPr id="19" name="Text 17"/>
-          <p:cNvSpPr txBox="1"/>
-          <p:nvPr/>
-        </p:nvSpPr>
-        <p:spPr>
-          <a:xfrm>
-            <a:off x="960120" y="4956048"/>
-            <a:ext cx="10241280" cy="548640"/>
-          </a:xfrm>
-          <a:prstGeom prst="rect">
-            <a:avLst/>
-          </a:prstGeom>
-          <a:noFill/>
-          <a:ln/>
-        </p:spPr>
-        <p:txBody>
-          <a:bodyPr wrap="square" lIns="0" tIns="0" rIns="0" bIns="0" rtlCol="0" anchor="ctr"/>
-          <a:lstStyle/>
-          <a:p>
-            <a:pPr rtl="1" algn="r" indent="0" marL="0">
-              <a:buNone/>
-            </a:pPr>
-            <a:r>
-              <a:rPr lang="en-US" sz="1250" b="1" dirty="0">
-                <a:solidFill>
-                  <a:srgbClr val="9F1239"/>
-                </a:solidFill>
-                <a:latin typeface="Arial" pitchFamily="34" charset="0"/>
-                <a:ea typeface="Arial" pitchFamily="34" charset="-122"/>
-                <a:cs typeface="Arial" pitchFamily="34" charset="-120"/>
-              </a:rPr>
-              <a:t>مع المادة (12) — الطلعة المعفوّة — كانت هذه الليلة ستسقط تلقائياً ولا يبقى لها أثر.</a:t>
-            </a:r>
-            <a:endParaRPr lang="en-US" sz="1250" dirty="0"/>
-          </a:p>
-        </p:txBody>
-      </p:sp>
+      <p:graphicFrame>
+        <p:nvGraphicFramePr>
+          <p:cNvPr id="4" name="Chart 0" descr=""/>
+          <p:cNvGraphicFramePr/>
+          <p:nvPr/>
+        </p:nvGraphicFramePr>
+        <p:xfrm>
+          <a:off x="640080" y="1645920"/>
+          <a:ext cx="10881360" cy="4480560"/>
+        </p:xfrm>
+        <a:graphic xmlns:a="http://schemas.openxmlformats.org/drawingml/2006/main">
+          <a:graphicData uri="http://schemas.openxmlformats.org/drawingml/2006/chart">
+            <c:chart xmlns:c="http://schemas.openxmlformats.org/drawingml/2006/chart" r:id="rId1"/>
+          </a:graphicData>
+        </a:graphic>
+      </p:graphicFrame>
     </p:spTree>
   </p:cSld>
   <p:clrMapOvr>
@@ -7794,6 +8208,715 @@
                 <a:ea typeface="Arial" pitchFamily="34" charset="-122"/>
                 <a:cs typeface="Arial" pitchFamily="34" charset="-120"/>
               </a:rPr>
+              <a:t>دليل الحرب: مطعم الشرفه</a:t>
+            </a:r>
+            <a:endParaRPr lang="en-US" sz="3400" dirty="0"/>
+          </a:p>
+        </p:txBody>
+      </p:sp>
+      <p:sp>
+        <p:nvSpPr>
+          <p:cNvPr id="3" name="Text 1"/>
+          <p:cNvSpPr txBox="1"/>
+          <p:nvPr/>
+        </p:nvSpPr>
+        <p:spPr>
+          <a:xfrm>
+            <a:off x="640080" y="1097280"/>
+            <a:ext cx="10881360" cy="365760"/>
+          </a:xfrm>
+          <a:prstGeom prst="rect">
+            <a:avLst/>
+          </a:prstGeom>
+          <a:noFill/>
+          <a:ln/>
+        </p:spPr>
+        <p:txBody>
+          <a:bodyPr wrap="square" lIns="0" tIns="0" rIns="0" bIns="0" rtlCol="0" anchor="ctr"/>
+          <a:lstStyle/>
+          <a:p>
+            <a:pPr rtl="1" algn="r" indent="0" marL="0">
+              <a:buNone/>
+            </a:pPr>
+            <a:r>
+              <a:rPr lang="en-US" sz="1300" dirty="0">
+                <a:solidFill>
+                  <a:srgbClr val="78716C"/>
+                </a:solidFill>
+                <a:latin typeface="Arial" pitchFamily="34" charset="0"/>
+                <a:ea typeface="Arial" pitchFamily="34" charset="-122"/>
+                <a:cs typeface="Arial" pitchFamily="34" charset="-120"/>
+              </a:rPr>
+              <a:t>طلعة طلال في الدورة الخامسة — أدنى تقييم في تاريخ المجموعة</a:t>
+            </a:r>
+            <a:endParaRPr lang="en-US" sz="1300" dirty="0"/>
+          </a:p>
+        </p:txBody>
+      </p:sp>
+      <p:sp>
+        <p:nvSpPr>
+          <p:cNvPr id="4" name="Shape 2"/>
+          <p:cNvSpPr/>
+          <p:nvPr/>
+        </p:nvSpPr>
+        <p:spPr>
+          <a:xfrm>
+            <a:off x="640080" y="1691640"/>
+            <a:ext cx="2491740" cy="1737360"/>
+          </a:xfrm>
+          <a:prstGeom prst="roundRect">
+            <a:avLst>
+              <a:gd name="adj" fmla="val 4737"/>
+            </a:avLst>
+          </a:prstGeom>
+          <a:solidFill>
+            <a:srgbClr val="FFFFFF"/>
+          </a:solidFill>
+          <a:ln w="12700">
+            <a:solidFill>
+              <a:srgbClr val="E7E5E4"/>
+            </a:solidFill>
+            <a:prstDash val="solid"/>
+          </a:ln>
+          <a:effectLst>
+            <a:outerShdw sx="100000" sy="100000" kx="0" ky="0" algn="bl" rotWithShape="0" blurRad="101600" dist="12700" dir="5400000">
+              <a:srgbClr val="000000">
+                <a:alpha val="7000"/>
+              </a:srgbClr>
+            </a:outerShdw>
+          </a:effectLst>
+        </p:spPr>
+      </p:sp>
+      <p:sp>
+        <p:nvSpPr>
+          <p:cNvPr id="5" name="Text 3"/>
+          <p:cNvSpPr txBox="1"/>
+          <p:nvPr/>
+        </p:nvSpPr>
+        <p:spPr>
+          <a:xfrm>
+            <a:off x="822960" y="1874520"/>
+            <a:ext cx="2125980" cy="365760"/>
+          </a:xfrm>
+          <a:prstGeom prst="rect">
+            <a:avLst/>
+          </a:prstGeom>
+          <a:noFill/>
+          <a:ln/>
+        </p:spPr>
+        <p:txBody>
+          <a:bodyPr wrap="square" lIns="0" tIns="0" rIns="0" bIns="0" rtlCol="0" anchor="ctr"/>
+          <a:lstStyle/>
+          <a:p>
+            <a:pPr rtl="1" algn="ctr" indent="0" marL="0">
+              <a:buNone/>
+            </a:pPr>
+            <a:r>
+              <a:rPr lang="en-US" sz="1500" b="1" dirty="0">
+                <a:solidFill>
+                  <a:srgbClr val="292524"/>
+                </a:solidFill>
+                <a:latin typeface="Arial" pitchFamily="34" charset="0"/>
+                <a:ea typeface="Arial" pitchFamily="34" charset="-122"/>
+                <a:cs typeface="Arial" pitchFamily="34" charset="-120"/>
+              </a:rPr>
+              <a:t>حكير</a:t>
+            </a:r>
+            <a:endParaRPr lang="en-US" sz="1500" dirty="0"/>
+          </a:p>
+        </p:txBody>
+      </p:sp>
+      <p:sp>
+        <p:nvSpPr>
+          <p:cNvPr id="6" name="Text 4"/>
+          <p:cNvSpPr txBox="1"/>
+          <p:nvPr/>
+        </p:nvSpPr>
+        <p:spPr>
+          <a:xfrm>
+            <a:off x="822960" y="2240280"/>
+            <a:ext cx="2125980" cy="914400"/>
+          </a:xfrm>
+          <a:prstGeom prst="rect">
+            <a:avLst/>
+          </a:prstGeom>
+          <a:noFill/>
+          <a:ln/>
+        </p:spPr>
+        <p:txBody>
+          <a:bodyPr wrap="square" lIns="0" tIns="0" rIns="0" bIns="0" rtlCol="0" anchor="ctr"/>
+          <a:lstStyle/>
+          <a:p>
+            <a:pPr algn="ctr" indent="0" marL="0">
+              <a:buNone/>
+            </a:pPr>
+            <a:r>
+              <a:rPr lang="en-US" sz="4400" b="1" dirty="0">
+                <a:solidFill>
+                  <a:srgbClr val="E11D48"/>
+                </a:solidFill>
+                <a:latin typeface="Arial" pitchFamily="34" charset="0"/>
+                <a:ea typeface="Arial" pitchFamily="34" charset="-122"/>
+                <a:cs typeface="Arial" pitchFamily="34" charset="-120"/>
+              </a:rPr>
+              <a:t>1</a:t>
+            </a:r>
+            <a:endParaRPr lang="en-US" sz="4400" dirty="0"/>
+          </a:p>
+        </p:txBody>
+      </p:sp>
+      <p:sp>
+        <p:nvSpPr>
+          <p:cNvPr id="7" name="Shape 5"/>
+          <p:cNvSpPr/>
+          <p:nvPr/>
+        </p:nvSpPr>
+        <p:spPr>
+          <a:xfrm>
+            <a:off x="3360420" y="1691640"/>
+            <a:ext cx="2491740" cy="1737360"/>
+          </a:xfrm>
+          <a:prstGeom prst="roundRect">
+            <a:avLst>
+              <a:gd name="adj" fmla="val 4737"/>
+            </a:avLst>
+          </a:prstGeom>
+          <a:solidFill>
+            <a:srgbClr val="FFFFFF"/>
+          </a:solidFill>
+          <a:ln w="12700">
+            <a:solidFill>
+              <a:srgbClr val="E7E5E4"/>
+            </a:solidFill>
+            <a:prstDash val="solid"/>
+          </a:ln>
+          <a:effectLst>
+            <a:outerShdw sx="100000" sy="100000" kx="0" ky="0" algn="bl" rotWithShape="0" blurRad="101600" dist="12700" dir="5400000">
+              <a:srgbClr val="000000">
+                <a:alpha val="7000"/>
+              </a:srgbClr>
+            </a:outerShdw>
+          </a:effectLst>
+        </p:spPr>
+      </p:sp>
+      <p:sp>
+        <p:nvSpPr>
+          <p:cNvPr id="8" name="Text 6"/>
+          <p:cNvSpPr txBox="1"/>
+          <p:nvPr/>
+        </p:nvSpPr>
+        <p:spPr>
+          <a:xfrm>
+            <a:off x="3543300" y="1874520"/>
+            <a:ext cx="2125980" cy="365760"/>
+          </a:xfrm>
+          <a:prstGeom prst="rect">
+            <a:avLst/>
+          </a:prstGeom>
+          <a:noFill/>
+          <a:ln/>
+        </p:spPr>
+        <p:txBody>
+          <a:bodyPr wrap="square" lIns="0" tIns="0" rIns="0" bIns="0" rtlCol="0" anchor="ctr"/>
+          <a:lstStyle/>
+          <a:p>
+            <a:pPr rtl="1" algn="ctr" indent="0" marL="0">
+              <a:buNone/>
+            </a:pPr>
+            <a:r>
+              <a:rPr lang="en-US" sz="1500" b="1" dirty="0">
+                <a:solidFill>
+                  <a:srgbClr val="292524"/>
+                </a:solidFill>
+                <a:latin typeface="Arial" pitchFamily="34" charset="0"/>
+                <a:ea typeface="Arial" pitchFamily="34" charset="-122"/>
+                <a:cs typeface="Arial" pitchFamily="34" charset="-120"/>
+              </a:rPr>
+              <a:t>هشام</a:t>
+            </a:r>
+            <a:endParaRPr lang="en-US" sz="1500" dirty="0"/>
+          </a:p>
+        </p:txBody>
+      </p:sp>
+      <p:sp>
+        <p:nvSpPr>
+          <p:cNvPr id="9" name="Text 7"/>
+          <p:cNvSpPr txBox="1"/>
+          <p:nvPr/>
+        </p:nvSpPr>
+        <p:spPr>
+          <a:xfrm>
+            <a:off x="3543300" y="2240280"/>
+            <a:ext cx="2125980" cy="914400"/>
+          </a:xfrm>
+          <a:prstGeom prst="rect">
+            <a:avLst/>
+          </a:prstGeom>
+          <a:noFill/>
+          <a:ln/>
+        </p:spPr>
+        <p:txBody>
+          <a:bodyPr wrap="square" lIns="0" tIns="0" rIns="0" bIns="0" rtlCol="0" anchor="ctr"/>
+          <a:lstStyle/>
+          <a:p>
+            <a:pPr algn="ctr" indent="0" marL="0">
+              <a:buNone/>
+            </a:pPr>
+            <a:r>
+              <a:rPr lang="en-US" sz="4400" b="1" dirty="0">
+                <a:solidFill>
+                  <a:srgbClr val="E11D48"/>
+                </a:solidFill>
+                <a:latin typeface="Arial" pitchFamily="34" charset="0"/>
+                <a:ea typeface="Arial" pitchFamily="34" charset="-122"/>
+                <a:cs typeface="Arial" pitchFamily="34" charset="-120"/>
+              </a:rPr>
+              <a:t>2</a:t>
+            </a:r>
+            <a:endParaRPr lang="en-US" sz="4400" dirty="0"/>
+          </a:p>
+        </p:txBody>
+      </p:sp>
+      <p:sp>
+        <p:nvSpPr>
+          <p:cNvPr id="10" name="Shape 8"/>
+          <p:cNvSpPr/>
+          <p:nvPr/>
+        </p:nvSpPr>
+        <p:spPr>
+          <a:xfrm>
+            <a:off x="6080760" y="1691640"/>
+            <a:ext cx="2491740" cy="1737360"/>
+          </a:xfrm>
+          <a:prstGeom prst="roundRect">
+            <a:avLst>
+              <a:gd name="adj" fmla="val 4737"/>
+            </a:avLst>
+          </a:prstGeom>
+          <a:solidFill>
+            <a:srgbClr val="FFFFFF"/>
+          </a:solidFill>
+          <a:ln w="12700">
+            <a:solidFill>
+              <a:srgbClr val="E7E5E4"/>
+            </a:solidFill>
+            <a:prstDash val="solid"/>
+          </a:ln>
+          <a:effectLst>
+            <a:outerShdw sx="100000" sy="100000" kx="0" ky="0" algn="bl" rotWithShape="0" blurRad="101600" dist="12700" dir="5400000">
+              <a:srgbClr val="000000">
+                <a:alpha val="7000"/>
+              </a:srgbClr>
+            </a:outerShdw>
+          </a:effectLst>
+        </p:spPr>
+      </p:sp>
+      <p:sp>
+        <p:nvSpPr>
+          <p:cNvPr id="11" name="Text 9"/>
+          <p:cNvSpPr txBox="1"/>
+          <p:nvPr/>
+        </p:nvSpPr>
+        <p:spPr>
+          <a:xfrm>
+            <a:off x="6263640" y="1874520"/>
+            <a:ext cx="2125980" cy="365760"/>
+          </a:xfrm>
+          <a:prstGeom prst="rect">
+            <a:avLst/>
+          </a:prstGeom>
+          <a:noFill/>
+          <a:ln/>
+        </p:spPr>
+        <p:txBody>
+          <a:bodyPr wrap="square" lIns="0" tIns="0" rIns="0" bIns="0" rtlCol="0" anchor="ctr"/>
+          <a:lstStyle/>
+          <a:p>
+            <a:pPr rtl="1" algn="ctr" indent="0" marL="0">
+              <a:buNone/>
+            </a:pPr>
+            <a:r>
+              <a:rPr lang="en-US" sz="1500" b="1" dirty="0">
+                <a:solidFill>
+                  <a:srgbClr val="292524"/>
+                </a:solidFill>
+                <a:latin typeface="Arial" pitchFamily="34" charset="0"/>
+                <a:ea typeface="Arial" pitchFamily="34" charset="-122"/>
+                <a:cs typeface="Arial" pitchFamily="34" charset="-120"/>
+              </a:rPr>
+              <a:t>خالد</a:t>
+            </a:r>
+            <a:endParaRPr lang="en-US" sz="1500" dirty="0"/>
+          </a:p>
+        </p:txBody>
+      </p:sp>
+      <p:sp>
+        <p:nvSpPr>
+          <p:cNvPr id="12" name="Text 10"/>
+          <p:cNvSpPr txBox="1"/>
+          <p:nvPr/>
+        </p:nvSpPr>
+        <p:spPr>
+          <a:xfrm>
+            <a:off x="6263640" y="2240280"/>
+            <a:ext cx="2125980" cy="914400"/>
+          </a:xfrm>
+          <a:prstGeom prst="rect">
+            <a:avLst/>
+          </a:prstGeom>
+          <a:noFill/>
+          <a:ln/>
+        </p:spPr>
+        <p:txBody>
+          <a:bodyPr wrap="square" lIns="0" tIns="0" rIns="0" bIns="0" rtlCol="0" anchor="ctr"/>
+          <a:lstStyle/>
+          <a:p>
+            <a:pPr algn="ctr" indent="0" marL="0">
+              <a:buNone/>
+            </a:pPr>
+            <a:r>
+              <a:rPr lang="en-US" sz="4400" b="1" dirty="0">
+                <a:solidFill>
+                  <a:srgbClr val="78716C"/>
+                </a:solidFill>
+                <a:latin typeface="Arial" pitchFamily="34" charset="0"/>
+                <a:ea typeface="Arial" pitchFamily="34" charset="-122"/>
+                <a:cs typeface="Arial" pitchFamily="34" charset="-120"/>
+              </a:rPr>
+              <a:t>3</a:t>
+            </a:r>
+            <a:endParaRPr lang="en-US" sz="4400" dirty="0"/>
+          </a:p>
+        </p:txBody>
+      </p:sp>
+      <p:sp>
+        <p:nvSpPr>
+          <p:cNvPr id="13" name="Shape 11"/>
+          <p:cNvSpPr/>
+          <p:nvPr/>
+        </p:nvSpPr>
+        <p:spPr>
+          <a:xfrm>
+            <a:off x="8801100" y="1691640"/>
+            <a:ext cx="2491740" cy="1737360"/>
+          </a:xfrm>
+          <a:prstGeom prst="roundRect">
+            <a:avLst>
+              <a:gd name="adj" fmla="val 4737"/>
+            </a:avLst>
+          </a:prstGeom>
+          <a:solidFill>
+            <a:srgbClr val="FFFFFF"/>
+          </a:solidFill>
+          <a:ln w="12700">
+            <a:solidFill>
+              <a:srgbClr val="E7E5E4"/>
+            </a:solidFill>
+            <a:prstDash val="solid"/>
+          </a:ln>
+          <a:effectLst>
+            <a:outerShdw sx="100000" sy="100000" kx="0" ky="0" algn="bl" rotWithShape="0" blurRad="101600" dist="12700" dir="5400000">
+              <a:srgbClr val="000000">
+                <a:alpha val="7000"/>
+              </a:srgbClr>
+            </a:outerShdw>
+          </a:effectLst>
+        </p:spPr>
+      </p:sp>
+      <p:sp>
+        <p:nvSpPr>
+          <p:cNvPr id="14" name="Text 12"/>
+          <p:cNvSpPr txBox="1"/>
+          <p:nvPr/>
+        </p:nvSpPr>
+        <p:spPr>
+          <a:xfrm>
+            <a:off x="8983980" y="1874520"/>
+            <a:ext cx="2125980" cy="365760"/>
+          </a:xfrm>
+          <a:prstGeom prst="rect">
+            <a:avLst/>
+          </a:prstGeom>
+          <a:noFill/>
+          <a:ln/>
+        </p:spPr>
+        <p:txBody>
+          <a:bodyPr wrap="square" lIns="0" tIns="0" rIns="0" bIns="0" rtlCol="0" anchor="ctr"/>
+          <a:lstStyle/>
+          <a:p>
+            <a:pPr rtl="1" algn="ctr" indent="0" marL="0">
+              <a:buNone/>
+            </a:pPr>
+            <a:r>
+              <a:rPr lang="en-US" sz="1500" b="1" dirty="0">
+                <a:solidFill>
+                  <a:srgbClr val="292524"/>
+                </a:solidFill>
+                <a:latin typeface="Arial" pitchFamily="34" charset="0"/>
+                <a:ea typeface="Arial" pitchFamily="34" charset="-122"/>
+                <a:cs typeface="Arial" pitchFamily="34" charset="-120"/>
+              </a:rPr>
+              <a:t>شوكا</a:t>
+            </a:r>
+            <a:endParaRPr lang="en-US" sz="1500" dirty="0"/>
+          </a:p>
+        </p:txBody>
+      </p:sp>
+      <p:sp>
+        <p:nvSpPr>
+          <p:cNvPr id="15" name="Text 13"/>
+          <p:cNvSpPr txBox="1"/>
+          <p:nvPr/>
+        </p:nvSpPr>
+        <p:spPr>
+          <a:xfrm>
+            <a:off x="8983980" y="2240280"/>
+            <a:ext cx="2125980" cy="914400"/>
+          </a:xfrm>
+          <a:prstGeom prst="rect">
+            <a:avLst/>
+          </a:prstGeom>
+          <a:noFill/>
+          <a:ln/>
+        </p:spPr>
+        <p:txBody>
+          <a:bodyPr wrap="square" lIns="0" tIns="0" rIns="0" bIns="0" rtlCol="0" anchor="ctr"/>
+          <a:lstStyle/>
+          <a:p>
+            <a:pPr algn="ctr" indent="0" marL="0">
+              <a:buNone/>
+            </a:pPr>
+            <a:r>
+              <a:rPr lang="en-US" sz="4400" b="1" dirty="0">
+                <a:solidFill>
+                  <a:srgbClr val="10B981"/>
+                </a:solidFill>
+                <a:latin typeface="Arial" pitchFamily="34" charset="0"/>
+                <a:ea typeface="Arial" pitchFamily="34" charset="-122"/>
+                <a:cs typeface="Arial" pitchFamily="34" charset="-120"/>
+              </a:rPr>
+              <a:t>5</a:t>
+            </a:r>
+            <a:endParaRPr lang="en-US" sz="4400" dirty="0"/>
+          </a:p>
+        </p:txBody>
+      </p:sp>
+      <p:sp>
+        <p:nvSpPr>
+          <p:cNvPr id="16" name="Shape 14"/>
+          <p:cNvSpPr/>
+          <p:nvPr/>
+        </p:nvSpPr>
+        <p:spPr>
+          <a:xfrm>
+            <a:off x="640080" y="3703320"/>
+            <a:ext cx="10881360" cy="2011680"/>
+          </a:xfrm>
+          <a:prstGeom prst="roundRect">
+            <a:avLst>
+              <a:gd name="adj" fmla="val 4091"/>
+            </a:avLst>
+          </a:prstGeom>
+          <a:solidFill>
+            <a:srgbClr val="FFE4E6"/>
+          </a:solidFill>
+          <a:ln w="12700">
+            <a:solidFill>
+              <a:srgbClr val="E7E5E4"/>
+            </a:solidFill>
+            <a:prstDash val="solid"/>
+          </a:ln>
+          <a:effectLst>
+            <a:outerShdw sx="100000" sy="100000" kx="0" ky="0" algn="bl" rotWithShape="0" blurRad="101600" dist="12700" dir="5400000">
+              <a:srgbClr val="000000">
+                <a:alpha val="7000"/>
+              </a:srgbClr>
+            </a:outerShdw>
+          </a:effectLst>
+        </p:spPr>
+      </p:sp>
+      <p:sp>
+        <p:nvSpPr>
+          <p:cNvPr id="17" name="Text 15"/>
+          <p:cNvSpPr txBox="1"/>
+          <p:nvPr/>
+        </p:nvSpPr>
+        <p:spPr>
+          <a:xfrm>
+            <a:off x="960120" y="3931920"/>
+            <a:ext cx="10241280" cy="457200"/>
+          </a:xfrm>
+          <a:prstGeom prst="rect">
+            <a:avLst/>
+          </a:prstGeom>
+          <a:noFill/>
+          <a:ln/>
+        </p:spPr>
+        <p:txBody>
+          <a:bodyPr wrap="square" lIns="0" tIns="0" rIns="0" bIns="0" rtlCol="0" anchor="ctr"/>
+          <a:lstStyle/>
+          <a:p>
+            <a:pPr rtl="1" algn="r" indent="0" marL="0">
+              <a:buNone/>
+            </a:pPr>
+            <a:r>
+              <a:rPr lang="en-US" sz="2200" b="1" dirty="0">
+                <a:solidFill>
+                  <a:srgbClr val="E11D48"/>
+                </a:solidFill>
+                <a:latin typeface="Arial" pitchFamily="34" charset="0"/>
+                <a:ea typeface="Arial" pitchFamily="34" charset="-122"/>
+                <a:cs typeface="Arial" pitchFamily="34" charset="-120"/>
+              </a:rPr>
+              <a:t>المحصّلة: 2.75</a:t>
+            </a:r>
+            <a:endParaRPr lang="en-US" sz="2200" dirty="0"/>
+          </a:p>
+        </p:txBody>
+      </p:sp>
+      <p:sp>
+        <p:nvSpPr>
+          <p:cNvPr id="18" name="Text 16"/>
+          <p:cNvSpPr txBox="1"/>
+          <p:nvPr/>
+        </p:nvSpPr>
+        <p:spPr>
+          <a:xfrm>
+            <a:off x="960120" y="4434840"/>
+            <a:ext cx="10241280" cy="457200"/>
+          </a:xfrm>
+          <a:prstGeom prst="rect">
+            <a:avLst/>
+          </a:prstGeom>
+          <a:noFill/>
+          <a:ln/>
+        </p:spPr>
+        <p:txBody>
+          <a:bodyPr wrap="square" lIns="0" tIns="0" rIns="0" bIns="0" rtlCol="0" anchor="ctr"/>
+          <a:lstStyle/>
+          <a:p>
+            <a:pPr rtl="1" algn="r" indent="0" marL="0">
+              <a:buNone/>
+            </a:pPr>
+            <a:r>
+              <a:rPr lang="en-US" sz="1350" dirty="0">
+                <a:solidFill>
+                  <a:srgbClr val="292524"/>
+                </a:solidFill>
+                <a:latin typeface="Arial" pitchFamily="34" charset="0"/>
+                <a:ea typeface="Arial" pitchFamily="34" charset="-122"/>
+                <a:cs typeface="Arial" pitchFamily="34" charset="-120"/>
+              </a:rPr>
+              <a:t>طلعة واحدة أنزلت طلال من المركز الرابع إلى الخامس. وسبقتها ماء ورد بالنمط نفسه في الدورة الرابعة.</a:t>
+            </a:r>
+            <a:endParaRPr lang="en-US" sz="1350" dirty="0"/>
+          </a:p>
+        </p:txBody>
+      </p:sp>
+      <p:sp>
+        <p:nvSpPr>
+          <p:cNvPr id="19" name="Text 17"/>
+          <p:cNvSpPr txBox="1"/>
+          <p:nvPr/>
+        </p:nvSpPr>
+        <p:spPr>
+          <a:xfrm>
+            <a:off x="960120" y="4956048"/>
+            <a:ext cx="10241280" cy="548640"/>
+          </a:xfrm>
+          <a:prstGeom prst="rect">
+            <a:avLst/>
+          </a:prstGeom>
+          <a:noFill/>
+          <a:ln/>
+        </p:spPr>
+        <p:txBody>
+          <a:bodyPr wrap="square" lIns="0" tIns="0" rIns="0" bIns="0" rtlCol="0" anchor="ctr"/>
+          <a:lstStyle/>
+          <a:p>
+            <a:pPr rtl="1" algn="r" indent="0" marL="0">
+              <a:buNone/>
+            </a:pPr>
+            <a:r>
+              <a:rPr lang="en-US" sz="1250" b="1" dirty="0">
+                <a:solidFill>
+                  <a:srgbClr val="9F1239"/>
+                </a:solidFill>
+                <a:latin typeface="Arial" pitchFamily="34" charset="0"/>
+                <a:ea typeface="Arial" pitchFamily="34" charset="-122"/>
+                <a:cs typeface="Arial" pitchFamily="34" charset="-120"/>
+              </a:rPr>
+              <a:t>مع المادة (12) — الطلعة المعفوّة — كانت هذه الليلة ستسقط تلقائياً ولا يبقى لها أثر.</a:t>
+            </a:r>
+            <a:endParaRPr lang="en-US" sz="1250" dirty="0"/>
+          </a:p>
+        </p:txBody>
+      </p:sp>
+    </p:spTree>
+  </p:cSld>
+  <p:clrMapOvr>
+    <a:masterClrMapping/>
+  </p:clrMapOvr>
+</p:sld>
+</file>
+
+<file path=ppt/slides/slide17.xml><?xml version="1.0" encoding="utf-8"?>
+<p:sld xmlns:a="http://schemas.openxmlformats.org/drawingml/2006/main" xmlns:r="http://schemas.openxmlformats.org/officeDocument/2006/relationships" xmlns:p="http://schemas.openxmlformats.org/presentationml/2006/main">
+  <p:cSld name="Slide 17">
+    <p:bg>
+      <p:bgPr>
+        <a:solidFill>
+          <a:srgbClr val="FAF7F2"/>
+        </a:solidFill>
+      </p:bgPr>
+    </p:bg>
+    <p:spTree>
+      <p:nvGrpSpPr>
+        <p:cNvPr id="1" name=""/>
+        <p:cNvGrpSpPr/>
+        <p:nvPr/>
+      </p:nvGrpSpPr>
+      <p:grpSpPr>
+        <a:xfrm>
+          <a:off x="0" y="0"/>
+          <a:ext cx="0" cy="0"/>
+          <a:chOff x="0" y="0"/>
+          <a:chExt cx="0" cy="0"/>
+        </a:xfrm>
+      </p:grpSpPr>
+      <p:sp>
+        <p:nvSpPr>
+          <p:cNvPr id="2" name="Text 0"/>
+          <p:cNvSpPr txBox="1"/>
+          <p:nvPr/>
+        </p:nvSpPr>
+        <p:spPr>
+          <a:xfrm>
+            <a:off x="640080" y="457200"/>
+            <a:ext cx="10881360" cy="685800"/>
+          </a:xfrm>
+          <a:prstGeom prst="rect">
+            <a:avLst/>
+          </a:prstGeom>
+          <a:noFill/>
+          <a:ln/>
+        </p:spPr>
+        <p:txBody>
+          <a:bodyPr wrap="square" lIns="0" tIns="0" rIns="0" bIns="0" rtlCol="0" anchor="ctr"/>
+          <a:lstStyle/>
+          <a:p>
+            <a:pPr rtl="1" algn="r" indent="0" marL="0">
+              <a:buNone/>
+            </a:pPr>
+            <a:r>
+              <a:rPr lang="en-US" sz="3400" b="1" dirty="0">
+                <a:solidFill>
+                  <a:srgbClr val="292524"/>
+                </a:solidFill>
+                <a:latin typeface="Arial" pitchFamily="34" charset="0"/>
+                <a:ea typeface="Arial" pitchFamily="34" charset="-122"/>
+                <a:cs typeface="Arial" pitchFamily="34" charset="-120"/>
+              </a:rPr>
               <a:t>فجوة المشاركة</a:t>
             </a:r>
             <a:endParaRPr lang="en-US" sz="3400" dirty="0"/>
@@ -8020,9 +9143,9 @@
 </p:sld>
 </file>
 
-<file path=ppt/slides/slide17.xml><?xml version="1.0" encoding="utf-8"?>
+<file path=ppt/slides/slide18.xml><?xml version="1.0" encoding="utf-8"?>
 <p:sld xmlns:a="http://schemas.openxmlformats.org/drawingml/2006/main" xmlns:r="http://schemas.openxmlformats.org/officeDocument/2006/relationships" xmlns:p="http://schemas.openxmlformats.org/presentationml/2006/main">
-  <p:cSld name="Slide 17">
+  <p:cSld name="Slide 18">
     <p:bg>
       <p:bgPr>
         <a:solidFill>
@@ -8178,539 +9301,6 @@
               <a:t>ما الذي يتغيّر في الدستور</a:t>
             </a:r>
             <a:endParaRPr lang="en-US" sz="1600" dirty="0"/>
-          </a:p>
-        </p:txBody>
-      </p:sp>
-    </p:spTree>
-  </p:cSld>
-  <p:clrMapOvr>
-    <a:masterClrMapping/>
-  </p:clrMapOvr>
-</p:sld>
-</file>
-
-<file path=ppt/slides/slide18.xml><?xml version="1.0" encoding="utf-8"?>
-<p:sld xmlns:a="http://schemas.openxmlformats.org/drawingml/2006/main" xmlns:r="http://schemas.openxmlformats.org/officeDocument/2006/relationships" xmlns:p="http://schemas.openxmlformats.org/presentationml/2006/main">
-  <p:cSld name="Slide 18">
-    <p:bg>
-      <p:bgPr>
-        <a:solidFill>
-          <a:srgbClr val="FAF7F2"/>
-        </a:solidFill>
-      </p:bgPr>
-    </p:bg>
-    <p:spTree>
-      <p:nvGrpSpPr>
-        <p:cNvPr id="1" name=""/>
-        <p:cNvGrpSpPr/>
-        <p:nvPr/>
-      </p:nvGrpSpPr>
-      <p:grpSpPr>
-        <a:xfrm>
-          <a:off x="0" y="0"/>
-          <a:ext cx="0" cy="0"/>
-          <a:chOff x="0" y="0"/>
-          <a:chExt cx="0" cy="0"/>
-        </a:xfrm>
-      </p:grpSpPr>
-      <p:sp>
-        <p:nvSpPr>
-          <p:cNvPr id="2" name="Text 0"/>
-          <p:cNvSpPr txBox="1"/>
-          <p:nvPr/>
-        </p:nvSpPr>
-        <p:spPr>
-          <a:xfrm>
-            <a:off x="640080" y="457200"/>
-            <a:ext cx="10881360" cy="685800"/>
-          </a:xfrm>
-          <a:prstGeom prst="rect">
-            <a:avLst/>
-          </a:prstGeom>
-          <a:noFill/>
-          <a:ln/>
-        </p:spPr>
-        <p:txBody>
-          <a:bodyPr wrap="square" lIns="0" tIns="0" rIns="0" bIns="0" rtlCol="0" anchor="ctr"/>
-          <a:lstStyle/>
-          <a:p>
-            <a:pPr rtl="1" algn="r" indent="0" marL="0">
-              <a:buNone/>
-            </a:pPr>
-            <a:r>
-              <a:rPr lang="en-US" sz="3400" b="1" dirty="0">
-                <a:solidFill>
-                  <a:srgbClr val="292524"/>
-                </a:solidFill>
-                <a:latin typeface="Arial" pitchFamily="34" charset="0"/>
-                <a:ea typeface="Arial" pitchFamily="34" charset="-122"/>
-                <a:cs typeface="Arial" pitchFamily="34" charset="-120"/>
-              </a:rPr>
-              <a:t>المادة (12) والمادة (13)</a:t>
-            </a:r>
-            <a:endParaRPr lang="en-US" sz="3400" dirty="0"/>
-          </a:p>
-        </p:txBody>
-      </p:sp>
-      <p:sp>
-        <p:nvSpPr>
-          <p:cNvPr id="3" name="Shape 1"/>
-          <p:cNvSpPr/>
-          <p:nvPr/>
-        </p:nvSpPr>
-        <p:spPr>
-          <a:xfrm>
-            <a:off x="640080" y="1188720"/>
-            <a:ext cx="10881360" cy="2148840"/>
-          </a:xfrm>
-          <a:prstGeom prst="roundRect">
-            <a:avLst>
-              <a:gd name="adj" fmla="val 3830"/>
-            </a:avLst>
-          </a:prstGeom>
-          <a:solidFill>
-            <a:srgbClr val="D1FAE5"/>
-          </a:solidFill>
-          <a:ln w="12700">
-            <a:solidFill>
-              <a:srgbClr val="E7E5E4"/>
-            </a:solidFill>
-            <a:prstDash val="solid"/>
-          </a:ln>
-          <a:effectLst>
-            <a:outerShdw sx="100000" sy="100000" kx="0" ky="0" algn="bl" rotWithShape="0" blurRad="101600" dist="12700" dir="5400000">
-              <a:srgbClr val="000000">
-                <a:alpha val="7000"/>
-              </a:srgbClr>
-            </a:outerShdw>
-          </a:effectLst>
-        </p:spPr>
-      </p:sp>
-      <p:sp>
-        <p:nvSpPr>
-          <p:cNvPr id="4" name="Shape 2"/>
-          <p:cNvSpPr/>
-          <p:nvPr/>
-        </p:nvSpPr>
-        <p:spPr>
-          <a:xfrm>
-            <a:off x="10835640" y="1417320"/>
-            <a:ext cx="457200" cy="457200"/>
-          </a:xfrm>
-          <a:prstGeom prst="ellipse">
-            <a:avLst/>
-          </a:prstGeom>
-          <a:solidFill>
-            <a:srgbClr val="10B981"/>
-          </a:solidFill>
-          <a:ln/>
-        </p:spPr>
-      </p:sp>
-      <p:sp>
-        <p:nvSpPr>
-          <p:cNvPr id="5" name="Text 3"/>
-          <p:cNvSpPr txBox="1"/>
-          <p:nvPr/>
-        </p:nvSpPr>
-        <p:spPr>
-          <a:xfrm>
-            <a:off x="10835640" y="1417320"/>
-            <a:ext cx="457200" cy="457200"/>
-          </a:xfrm>
-          <a:prstGeom prst="rect">
-            <a:avLst/>
-          </a:prstGeom>
-          <a:noFill/>
-          <a:ln/>
-        </p:spPr>
-        <p:txBody>
-          <a:bodyPr wrap="square" lIns="0" tIns="0" rIns="0" bIns="0" rtlCol="0" anchor="ctr"/>
-          <a:lstStyle/>
-          <a:p>
-            <a:pPr algn="ctr" indent="0" marL="0">
-              <a:buNone/>
-            </a:pPr>
-            <a:r>
-              <a:rPr lang="en-US" sz="1400" b="1" dirty="0">
-                <a:solidFill>
-                  <a:srgbClr val="FFFFFF"/>
-                </a:solidFill>
-                <a:latin typeface="Arial" pitchFamily="34" charset="0"/>
-                <a:ea typeface="Arial" pitchFamily="34" charset="-122"/>
-                <a:cs typeface="Arial" pitchFamily="34" charset="-120"/>
-              </a:rPr>
-              <a:t>12</a:t>
-            </a:r>
-            <a:endParaRPr lang="en-US" sz="1400" dirty="0"/>
-          </a:p>
-        </p:txBody>
-      </p:sp>
-      <p:sp>
-        <p:nvSpPr>
-          <p:cNvPr id="6" name="Text 4"/>
-          <p:cNvSpPr txBox="1"/>
-          <p:nvPr/>
-        </p:nvSpPr>
-        <p:spPr>
-          <a:xfrm>
-            <a:off x="960120" y="1417320"/>
-            <a:ext cx="9692640" cy="411480"/>
-          </a:xfrm>
-          <a:prstGeom prst="rect">
-            <a:avLst/>
-          </a:prstGeom>
-          <a:noFill/>
-          <a:ln/>
-        </p:spPr>
-        <p:txBody>
-          <a:bodyPr wrap="square" lIns="0" tIns="0" rIns="0" bIns="0" rtlCol="0" anchor="ctr"/>
-          <a:lstStyle/>
-          <a:p>
-            <a:pPr rtl="1" algn="r" indent="0" marL="0">
-              <a:buNone/>
-            </a:pPr>
-            <a:r>
-              <a:rPr lang="en-US" sz="2100" b="1" dirty="0">
-                <a:solidFill>
-                  <a:srgbClr val="065F46"/>
-                </a:solidFill>
-                <a:latin typeface="Arial" pitchFamily="34" charset="0"/>
-                <a:ea typeface="Arial" pitchFamily="34" charset="-122"/>
-                <a:cs typeface="Arial" pitchFamily="34" charset="-120"/>
-              </a:rPr>
-              <a:t>الطلعة المعفوّة</a:t>
-            </a:r>
-            <a:endParaRPr lang="en-US" sz="2100" dirty="0"/>
-          </a:p>
-        </p:txBody>
-      </p:sp>
-      <p:sp>
-        <p:nvSpPr>
-          <p:cNvPr id="7" name="Text 5"/>
-          <p:cNvSpPr txBox="1"/>
-          <p:nvPr/>
-        </p:nvSpPr>
-        <p:spPr>
-          <a:xfrm>
-            <a:off x="960120" y="1901952"/>
-            <a:ext cx="10241280" cy="457200"/>
-          </a:xfrm>
-          <a:prstGeom prst="rect">
-            <a:avLst/>
-          </a:prstGeom>
-          <a:noFill/>
-          <a:ln/>
-        </p:spPr>
-        <p:txBody>
-          <a:bodyPr wrap="square" lIns="0" tIns="0" rIns="0" bIns="0" rtlCol="0" anchor="ctr"/>
-          <a:lstStyle/>
-          <a:p>
-            <a:pPr rtl="1" algn="r" indent="0" marL="0">
-              <a:buNone/>
-            </a:pPr>
-            <a:r>
-              <a:rPr lang="en-US" sz="1350" dirty="0">
-                <a:solidFill>
-                  <a:srgbClr val="292524"/>
-                </a:solidFill>
-                <a:latin typeface="Arial" pitchFamily="34" charset="0"/>
-                <a:ea typeface="Arial" pitchFamily="34" charset="-122"/>
-                <a:cs typeface="Arial" pitchFamily="34" charset="-120"/>
-              </a:rPr>
-              <a:t>تُسقَط أسوأ طلعة واحدة من سجل كل ملك عند احتساب الترتيب، بشرط أن يكون في سجله أربع طلعات فأكثر.</a:t>
-            </a:r>
-            <a:endParaRPr lang="en-US" sz="1350" dirty="0"/>
-          </a:p>
-        </p:txBody>
-      </p:sp>
-      <p:sp>
-        <p:nvSpPr>
-          <p:cNvPr id="8" name="Text 6"/>
-          <p:cNvSpPr txBox="1"/>
-          <p:nvPr/>
-        </p:nvSpPr>
-        <p:spPr>
-          <a:xfrm>
-            <a:off x="960120" y="2395728"/>
-            <a:ext cx="10241280" cy="548640"/>
-          </a:xfrm>
-          <a:prstGeom prst="rect">
-            <a:avLst/>
-          </a:prstGeom>
-          <a:noFill/>
-          <a:ln/>
-        </p:spPr>
-        <p:txBody>
-          <a:bodyPr wrap="square" lIns="0" tIns="0" rIns="0" bIns="0" rtlCol="0" anchor="ctr"/>
-          <a:lstStyle/>
-          <a:p>
-            <a:pPr rtl="1" algn="r" indent="0" marL="0">
-              <a:lnSpc>
-                <a:spcPct val="125000"/>
-              </a:lnSpc>
-              <a:buNone/>
-            </a:pPr>
-            <a:r>
-              <a:rPr lang="en-US" sz="1250" b="1" dirty="0">
-                <a:solidFill>
-                  <a:srgbClr val="047857"/>
-                </a:solidFill>
-                <a:latin typeface="Arial" pitchFamily="34" charset="0"/>
-                <a:ea typeface="Arial" pitchFamily="34" charset="-122"/>
-                <a:cs typeface="Arial" pitchFamily="34" charset="-120"/>
-              </a:rPr>
-              <a:t>الأثر: أي هجوم منسّق على ليلة واحدة يسقط تلقائياً، فلا يُحاسَب أحد عمراً كاملاً على ليلة واحدة</a:t>
-            </a:r>
-            <a:endParaRPr lang="en-US" sz="1250" dirty="0"/>
-          </a:p>
-        </p:txBody>
-      </p:sp>
-      <p:sp>
-        <p:nvSpPr>
-          <p:cNvPr id="9" name="Shape 7"/>
-          <p:cNvSpPr/>
-          <p:nvPr/>
-        </p:nvSpPr>
-        <p:spPr>
-          <a:xfrm>
-            <a:off x="640080" y="3520440"/>
-            <a:ext cx="10881360" cy="2377440"/>
-          </a:xfrm>
-          <a:prstGeom prst="roundRect">
-            <a:avLst>
-              <a:gd name="adj" fmla="val 3462"/>
-            </a:avLst>
-          </a:prstGeom>
-          <a:solidFill>
-            <a:srgbClr val="E0F2FE"/>
-          </a:solidFill>
-          <a:ln w="12700">
-            <a:solidFill>
-              <a:srgbClr val="E7E5E4"/>
-            </a:solidFill>
-            <a:prstDash val="solid"/>
-          </a:ln>
-          <a:effectLst>
-            <a:outerShdw sx="100000" sy="100000" kx="0" ky="0" algn="bl" rotWithShape="0" blurRad="101600" dist="12700" dir="5400000">
-              <a:srgbClr val="000000">
-                <a:alpha val="7000"/>
-              </a:srgbClr>
-            </a:outerShdw>
-          </a:effectLst>
-        </p:spPr>
-      </p:sp>
-      <p:sp>
-        <p:nvSpPr>
-          <p:cNvPr id="10" name="Shape 8"/>
-          <p:cNvSpPr/>
-          <p:nvPr/>
-        </p:nvSpPr>
-        <p:spPr>
-          <a:xfrm>
-            <a:off x="10835640" y="3749040"/>
-            <a:ext cx="457200" cy="457200"/>
-          </a:xfrm>
-          <a:prstGeom prst="ellipse">
-            <a:avLst/>
-          </a:prstGeom>
-          <a:solidFill>
-            <a:srgbClr val="0284C7"/>
-          </a:solidFill>
-          <a:ln/>
-        </p:spPr>
-      </p:sp>
-      <p:sp>
-        <p:nvSpPr>
-          <p:cNvPr id="11" name="Text 9"/>
-          <p:cNvSpPr txBox="1"/>
-          <p:nvPr/>
-        </p:nvSpPr>
-        <p:spPr>
-          <a:xfrm>
-            <a:off x="10835640" y="3749040"/>
-            <a:ext cx="457200" cy="457200"/>
-          </a:xfrm>
-          <a:prstGeom prst="rect">
-            <a:avLst/>
-          </a:prstGeom>
-          <a:noFill/>
-          <a:ln/>
-        </p:spPr>
-        <p:txBody>
-          <a:bodyPr wrap="square" lIns="0" tIns="0" rIns="0" bIns="0" rtlCol="0" anchor="ctr"/>
-          <a:lstStyle/>
-          <a:p>
-            <a:pPr algn="ctr" indent="0" marL="0">
-              <a:buNone/>
-            </a:pPr>
-            <a:r>
-              <a:rPr lang="en-US" sz="1400" b="1" dirty="0">
-                <a:solidFill>
-                  <a:srgbClr val="FFFFFF"/>
-                </a:solidFill>
-                <a:latin typeface="Arial" pitchFamily="34" charset="0"/>
-                <a:ea typeface="Arial" pitchFamily="34" charset="-122"/>
-                <a:cs typeface="Arial" pitchFamily="34" charset="-120"/>
-              </a:rPr>
-              <a:t>13</a:t>
-            </a:r>
-            <a:endParaRPr lang="en-US" sz="1400" dirty="0"/>
-          </a:p>
-        </p:txBody>
-      </p:sp>
-      <p:sp>
-        <p:nvSpPr>
-          <p:cNvPr id="12" name="Text 10"/>
-          <p:cNvSpPr txBox="1"/>
-          <p:nvPr/>
-        </p:nvSpPr>
-        <p:spPr>
-          <a:xfrm>
-            <a:off x="960120" y="3749040"/>
-            <a:ext cx="9692640" cy="411480"/>
-          </a:xfrm>
-          <a:prstGeom prst="rect">
-            <a:avLst/>
-          </a:prstGeom>
-          <a:noFill/>
-          <a:ln/>
-        </p:spPr>
-        <p:txBody>
-          <a:bodyPr wrap="square" lIns="0" tIns="0" rIns="0" bIns="0" rtlCol="0" anchor="ctr"/>
-          <a:lstStyle/>
-          <a:p>
-            <a:pPr rtl="1" algn="r" indent="0" marL="0">
-              <a:buNone/>
-            </a:pPr>
-            <a:r>
-              <a:rPr lang="en-US" sz="2100" b="1" dirty="0">
-                <a:solidFill>
-                  <a:srgbClr val="075985"/>
-                </a:solidFill>
-                <a:latin typeface="Arial" pitchFamily="34" charset="0"/>
-                <a:ea typeface="Arial" pitchFamily="34" charset="-122"/>
-                <a:cs typeface="Arial" pitchFamily="34" charset="-120"/>
-              </a:rPr>
-              <a:t>التنحّي لتعارض المصالح</a:t>
-            </a:r>
-            <a:endParaRPr lang="en-US" sz="2100" dirty="0"/>
-          </a:p>
-        </p:txBody>
-      </p:sp>
-      <p:sp>
-        <p:nvSpPr>
-          <p:cNvPr id="13" name="Text 11"/>
-          <p:cNvSpPr txBox="1"/>
-          <p:nvPr/>
-        </p:nvSpPr>
-        <p:spPr>
-          <a:xfrm>
-            <a:off x="960120" y="4233672"/>
-            <a:ext cx="10241280" cy="457200"/>
-          </a:xfrm>
-          <a:prstGeom prst="rect">
-            <a:avLst/>
-          </a:prstGeom>
-          <a:noFill/>
-          <a:ln/>
-        </p:spPr>
-        <p:txBody>
-          <a:bodyPr wrap="square" lIns="0" tIns="0" rIns="0" bIns="0" rtlCol="0" anchor="ctr"/>
-          <a:lstStyle/>
-          <a:p>
-            <a:pPr rtl="1" algn="r" indent="0" marL="0">
-              <a:buNone/>
-            </a:pPr>
-            <a:r>
-              <a:rPr lang="en-US" sz="1350" dirty="0">
-                <a:solidFill>
-                  <a:srgbClr val="292524"/>
-                </a:solidFill>
-                <a:latin typeface="Arial" pitchFamily="34" charset="0"/>
-                <a:ea typeface="Arial" pitchFamily="34" charset="-122"/>
-                <a:cs typeface="Arial" pitchFamily="34" charset="-120"/>
-              </a:rPr>
-              <a:t>إذا ثبتت خصومة بين عضوين، لا يُحتسب تقييم أيٍّ منهما على طلعة الآخر — بقرار العميد وموافقة عضوين.</a:t>
-            </a:r>
-            <a:endParaRPr lang="en-US" sz="1350" dirty="0"/>
-          </a:p>
-        </p:txBody>
-      </p:sp>
-      <p:sp>
-        <p:nvSpPr>
-          <p:cNvPr id="14" name="Text 12"/>
-          <p:cNvSpPr txBox="1"/>
-          <p:nvPr/>
-        </p:nvSpPr>
-        <p:spPr>
-          <a:xfrm>
-            <a:off x="960120" y="4736592"/>
-            <a:ext cx="10241280" cy="365760"/>
-          </a:xfrm>
-          <a:prstGeom prst="rect">
-            <a:avLst/>
-          </a:prstGeom>
-          <a:noFill/>
-          <a:ln/>
-        </p:spPr>
-        <p:txBody>
-          <a:bodyPr wrap="square" lIns="0" tIns="0" rIns="0" bIns="0" rtlCol="0" anchor="ctr"/>
-          <a:lstStyle/>
-          <a:p>
-            <a:pPr rtl="1" algn="r" indent="0" marL="0">
-              <a:buNone/>
-            </a:pPr>
-            <a:r>
-              <a:rPr lang="en-US" sz="1250" b="1" dirty="0">
-                <a:solidFill>
-                  <a:srgbClr val="0369A1"/>
-                </a:solidFill>
-                <a:latin typeface="Arial" pitchFamily="34" charset="0"/>
-                <a:ea typeface="Arial" pitchFamily="34" charset="-122"/>
-                <a:cs typeface="Arial" pitchFamily="34" charset="-120"/>
-              </a:rPr>
-              <a:t>شرط الحماية — لا يُطبَّق التنحّي إذا كان سيُبقي الطلعة بأقل من ثلاثة مقيّمين</a:t>
-            </a:r>
-            <a:endParaRPr lang="en-US" sz="1250" dirty="0"/>
-          </a:p>
-        </p:txBody>
-      </p:sp>
-      <p:sp>
-        <p:nvSpPr>
-          <p:cNvPr id="15" name="Text 13"/>
-          <p:cNvSpPr txBox="1"/>
-          <p:nvPr/>
-        </p:nvSpPr>
-        <p:spPr>
-          <a:xfrm>
-            <a:off x="960120" y="5120640"/>
-            <a:ext cx="10241280" cy="457200"/>
-          </a:xfrm>
-          <a:prstGeom prst="rect">
-            <a:avLst/>
-          </a:prstGeom>
-          <a:noFill/>
-          <a:ln/>
-        </p:spPr>
-        <p:txBody>
-          <a:bodyPr wrap="square" lIns="0" tIns="0" rIns="0" bIns="0" rtlCol="0" anchor="ctr"/>
-          <a:lstStyle/>
-          <a:p>
-            <a:pPr rtl="1" algn="r" indent="0" marL="0">
-              <a:buNone/>
-            </a:pPr>
-            <a:r>
-              <a:rPr lang="en-US" sz="1200" dirty="0">
-                <a:solidFill>
-                  <a:srgbClr val="0369A1"/>
-                </a:solidFill>
-                <a:latin typeface="Arial" pitchFamily="34" charset="0"/>
-                <a:ea typeface="Arial" pitchFamily="34" charset="-122"/>
-                <a:cs typeface="Arial" pitchFamily="34" charset="-120"/>
-              </a:rPr>
-              <a:t>عند اختبار المادة بلا هذا الشرط، بلغ معدّل أحد الملوك 5.00 كاملة من مقيّم واحد فقط</a:t>
-            </a:r>
-            <a:endParaRPr lang="en-US" sz="1200" dirty="0"/>
           </a:p>
         </p:txBody>
       </p:sp>
@@ -8779,7 +9369,7 @@
                 <a:ea typeface="Arial" pitchFamily="34" charset="-122"/>
                 <a:cs typeface="Arial" pitchFamily="34" charset="-120"/>
               </a:rPr>
-              <a:t>المادة (14) والمادة (15)</a:t>
+              <a:t>المادة (12) والمادة (13)</a:t>
             </a:r>
             <a:endParaRPr lang="en-US" sz="3400" dirty="0"/>
           </a:p>
@@ -8802,7 +9392,7 @@
             </a:avLst>
           </a:prstGeom>
           <a:solidFill>
-            <a:srgbClr val="EDE9FE"/>
+            <a:srgbClr val="D1FAE5"/>
           </a:solidFill>
           <a:ln w="12700">
             <a:solidFill>
@@ -8834,7 +9424,7 @@
             <a:avLst/>
           </a:prstGeom>
           <a:solidFill>
-            <a:srgbClr val="7C3AED"/>
+            <a:srgbClr val="10B981"/>
           </a:solidFill>
           <a:ln/>
         </p:spPr>
@@ -8872,7 +9462,7 @@
                 <a:ea typeface="Arial" pitchFamily="34" charset="-122"/>
                 <a:cs typeface="Arial" pitchFamily="34" charset="-120"/>
               </a:rPr>
-              <a:t>14</a:t>
+              <a:t>12</a:t>
             </a:r>
             <a:endParaRPr lang="en-US" sz="1400" dirty="0"/>
           </a:p>
@@ -8905,13 +9495,13 @@
             <a:r>
               <a:rPr lang="en-US" sz="2100" b="1" dirty="0">
                 <a:solidFill>
-                  <a:srgbClr val="5B21B6"/>
-                </a:solidFill>
-                <a:latin typeface="Arial" pitchFamily="34" charset="0"/>
-                <a:ea typeface="Arial" pitchFamily="34" charset="-122"/>
-                <a:cs typeface="Arial" pitchFamily="34" charset="-120"/>
-              </a:rPr>
-              <a:t>ترجيح الدورة الأخيرة</a:t>
+                  <a:srgbClr val="065F46"/>
+                </a:solidFill>
+                <a:latin typeface="Arial" pitchFamily="34" charset="0"/>
+                <a:ea typeface="Arial" pitchFamily="34" charset="-122"/>
+                <a:cs typeface="Arial" pitchFamily="34" charset="-120"/>
+              </a:rPr>
+              <a:t>الطلعة المعفوّة</a:t>
             </a:r>
             <a:endParaRPr lang="en-US" sz="2100" dirty="0"/>
           </a:p>
@@ -8950,7 +9540,7 @@
                 <a:ea typeface="Arial" pitchFamily="34" charset="-122"/>
                 <a:cs typeface="Arial" pitchFamily="34" charset="-120"/>
               </a:rPr>
-              <a:t>تُحتسب الدورة المكتملة الأخيرة بوزن 2.5 — كأنها دورتان ونصف — وباقي الدورات بوزن 1، ولا تدخل دورة الحساب قبل أن يلعبها الستة.</a:t>
+              <a:t>تُسقَط أسوأ طلعة واحدة من سجل كل ملك عند احتساب الترتيب، بشرط أن يكون في سجله أربع طلعات فأكثر.</a:t>
             </a:r>
             <a:endParaRPr lang="en-US" sz="1350" dirty="0"/>
           </a:p>
@@ -8986,13 +9576,13 @@
             <a:r>
               <a:rPr lang="en-US" sz="1250" b="1" dirty="0">
                 <a:solidFill>
-                  <a:srgbClr val="6D28D9"/>
-                </a:solidFill>
-                <a:latin typeface="Arial" pitchFamily="34" charset="0"/>
-                <a:ea typeface="Arial" pitchFamily="34" charset="-122"/>
-                <a:cs typeface="Arial" pitchFamily="34" charset="-120"/>
-              </a:rPr>
-              <a:t>الأثر: الدورة الجارية تحسم الترتيب أكثر من كل ما سبقها — من تحسّن يصعد بسرعة، ومن تراجع ينزل بسرعة</a:t>
+                  <a:srgbClr val="047857"/>
+                </a:solidFill>
+                <a:latin typeface="Arial" pitchFamily="34" charset="0"/>
+                <a:ea typeface="Arial" pitchFamily="34" charset="-122"/>
+                <a:cs typeface="Arial" pitchFamily="34" charset="-120"/>
+              </a:rPr>
+              <a:t>الأثر: أي هجوم منسّق على ليلة واحدة يسقط تلقائياً، فلا يُحاسَب أحد عمراً كاملاً على ليلة واحدة</a:t>
             </a:r>
             <a:endParaRPr lang="en-US" sz="1250" dirty="0"/>
           </a:p>
@@ -9015,7 +9605,7 @@
             </a:avLst>
           </a:prstGeom>
           <a:solidFill>
-            <a:srgbClr val="FFE4E6"/>
+            <a:srgbClr val="E0F2FE"/>
           </a:solidFill>
           <a:ln w="12700">
             <a:solidFill>
@@ -9047,7 +9637,7 @@
             <a:avLst/>
           </a:prstGeom>
           <a:solidFill>
-            <a:srgbClr val="E11D48"/>
+            <a:srgbClr val="0284C7"/>
           </a:solidFill>
           <a:ln/>
         </p:spPr>
@@ -9085,7 +9675,7 @@
                 <a:ea typeface="Arial" pitchFamily="34" charset="-122"/>
                 <a:cs typeface="Arial" pitchFamily="34" charset="-120"/>
               </a:rPr>
-              <a:t>15</a:t>
+              <a:t>13</a:t>
             </a:r>
             <a:endParaRPr lang="en-US" sz="1400" dirty="0"/>
           </a:p>
@@ -9118,13 +9708,13 @@
             <a:r>
               <a:rPr lang="en-US" sz="2100" b="1" dirty="0">
                 <a:solidFill>
-                  <a:srgbClr val="9F1239"/>
-                </a:solidFill>
-                <a:latin typeface="Arial" pitchFamily="34" charset="0"/>
-                <a:ea typeface="Arial" pitchFamily="34" charset="-122"/>
-                <a:cs typeface="Arial" pitchFamily="34" charset="-120"/>
-              </a:rPr>
-              <a:t>بطلان التواطؤ</a:t>
+                  <a:srgbClr val="075985"/>
+                </a:solidFill>
+                <a:latin typeface="Arial" pitchFamily="34" charset="0"/>
+                <a:ea typeface="Arial" pitchFamily="34" charset="-122"/>
+                <a:cs typeface="Arial" pitchFamily="34" charset="-120"/>
+              </a:rPr>
+              <a:t>التنحّي لتعارض المصالح</a:t>
             </a:r>
             <a:endParaRPr lang="en-US" sz="2100" dirty="0"/>
           </a:p>
@@ -9139,7 +9729,7 @@
         <p:spPr>
           <a:xfrm>
             <a:off x="960120" y="4233672"/>
-            <a:ext cx="10241280" cy="502920"/>
+            <a:ext cx="10241280" cy="457200"/>
           </a:xfrm>
           <a:prstGeom prst="rect">
             <a:avLst/>
@@ -9163,7 +9753,7 @@
                 <a:ea typeface="Arial" pitchFamily="34" charset="-122"/>
                 <a:cs typeface="Arial" pitchFamily="34" charset="-120"/>
               </a:rPr>
-              <a:t>كل اتفاق مسبق على منح درجة محدّدة لشخص بعينه — بصرف النظر عن التجربة — باطل ولا أثر له، سواء أُبرم قبل هذا الدستور أو بعده.</a:t>
+              <a:t>إذا ثبتت خصومة بين عضوين، لا يُحتسب تقييم أيٍّ منهما على طلعة الآخر — بقرار العميد وموافقة عضوين.</a:t>
             </a:r>
             <a:endParaRPr lang="en-US" sz="1350" dirty="0"/>
           </a:p>
@@ -9177,7 +9767,7 @@
         </p:nvSpPr>
         <p:spPr>
           <a:xfrm>
-            <a:off x="960120" y="4773168"/>
+            <a:off x="960120" y="4736592"/>
             <a:ext cx="10241280" cy="365760"/>
           </a:xfrm>
           <a:prstGeom prst="rect">
@@ -9196,13 +9786,13 @@
             <a:r>
               <a:rPr lang="en-US" sz="1250" b="1" dirty="0">
                 <a:solidFill>
-                  <a:srgbClr val="BE123C"/>
-                </a:solidFill>
-                <a:latin typeface="Arial" pitchFamily="34" charset="0"/>
-                <a:ea typeface="Arial" pitchFamily="34" charset="-122"/>
-                <a:cs typeface="Arial" pitchFamily="34" charset="-120"/>
-              </a:rPr>
-              <a:t>الجزاء: يُلغى تقييم المتواطئ على تلك الطلعة، وعند التكرار لبقية الدورة</a:t>
+                  <a:srgbClr val="0369A1"/>
+                </a:solidFill>
+                <a:latin typeface="Arial" pitchFamily="34" charset="0"/>
+                <a:ea typeface="Arial" pitchFamily="34" charset="-122"/>
+                <a:cs typeface="Arial" pitchFamily="34" charset="-120"/>
+              </a:rPr>
+              <a:t>شرط الحماية — لا يُطبَّق التنحّي إذا كان سيُبقي الطلعة بأقل من ثلاثة مقيّمين</a:t>
             </a:r>
             <a:endParaRPr lang="en-US" sz="1250" dirty="0"/>
           </a:p>
@@ -9216,7 +9806,7 @@
         </p:nvSpPr>
         <p:spPr>
           <a:xfrm>
-            <a:off x="960120" y="5157216"/>
+            <a:off x="960120" y="5120640"/>
             <a:ext cx="10241280" cy="457200"/>
           </a:xfrm>
           <a:prstGeom prst="rect">
@@ -9235,13 +9825,13 @@
             <a:r>
               <a:rPr lang="en-US" sz="1200" dirty="0">
                 <a:solidFill>
-                  <a:srgbClr val="BE123C"/>
-                </a:solidFill>
-                <a:latin typeface="Arial" pitchFamily="34" charset="0"/>
-                <a:ea typeface="Arial" pitchFamily="34" charset="-122"/>
-                <a:cs typeface="Arial" pitchFamily="34" charset="-120"/>
-              </a:rPr>
-              <a:t>القرار بيد العميد وموافقة عضوين، وفق آلية المادة (1)</a:t>
+                  <a:srgbClr val="0369A1"/>
+                </a:solidFill>
+                <a:latin typeface="Arial" pitchFamily="34" charset="0"/>
+                <a:ea typeface="Arial" pitchFamily="34" charset="-122"/>
+                <a:cs typeface="Arial" pitchFamily="34" charset="-120"/>
+              </a:rPr>
+              <a:t>عند اختبار المادة بلا هذا الشرط، بلغ معدّل أحد الملوك 5.00 كاملة من مقيّم واحد فقط</a:t>
             </a:r>
             <a:endParaRPr lang="en-US" sz="1200" dirty="0"/>
           </a:p>
@@ -11243,6 +11833,539 @@
                 <a:ea typeface="Arial" pitchFamily="34" charset="-122"/>
                 <a:cs typeface="Arial" pitchFamily="34" charset="-120"/>
               </a:rPr>
+              <a:t>المادة (14) والمادة (15)</a:t>
+            </a:r>
+            <a:endParaRPr lang="en-US" sz="3400" dirty="0"/>
+          </a:p>
+        </p:txBody>
+      </p:sp>
+      <p:sp>
+        <p:nvSpPr>
+          <p:cNvPr id="3" name="Shape 1"/>
+          <p:cNvSpPr/>
+          <p:nvPr/>
+        </p:nvSpPr>
+        <p:spPr>
+          <a:xfrm>
+            <a:off x="640080" y="1188720"/>
+            <a:ext cx="10881360" cy="2148840"/>
+          </a:xfrm>
+          <a:prstGeom prst="roundRect">
+            <a:avLst>
+              <a:gd name="adj" fmla="val 3830"/>
+            </a:avLst>
+          </a:prstGeom>
+          <a:solidFill>
+            <a:srgbClr val="EDE9FE"/>
+          </a:solidFill>
+          <a:ln w="12700">
+            <a:solidFill>
+              <a:srgbClr val="E7E5E4"/>
+            </a:solidFill>
+            <a:prstDash val="solid"/>
+          </a:ln>
+          <a:effectLst>
+            <a:outerShdw sx="100000" sy="100000" kx="0" ky="0" algn="bl" rotWithShape="0" blurRad="101600" dist="12700" dir="5400000">
+              <a:srgbClr val="000000">
+                <a:alpha val="7000"/>
+              </a:srgbClr>
+            </a:outerShdw>
+          </a:effectLst>
+        </p:spPr>
+      </p:sp>
+      <p:sp>
+        <p:nvSpPr>
+          <p:cNvPr id="4" name="Shape 2"/>
+          <p:cNvSpPr/>
+          <p:nvPr/>
+        </p:nvSpPr>
+        <p:spPr>
+          <a:xfrm>
+            <a:off x="10835640" y="1417320"/>
+            <a:ext cx="457200" cy="457200"/>
+          </a:xfrm>
+          <a:prstGeom prst="ellipse">
+            <a:avLst/>
+          </a:prstGeom>
+          <a:solidFill>
+            <a:srgbClr val="7C3AED"/>
+          </a:solidFill>
+          <a:ln/>
+        </p:spPr>
+      </p:sp>
+      <p:sp>
+        <p:nvSpPr>
+          <p:cNvPr id="5" name="Text 3"/>
+          <p:cNvSpPr txBox="1"/>
+          <p:nvPr/>
+        </p:nvSpPr>
+        <p:spPr>
+          <a:xfrm>
+            <a:off x="10835640" y="1417320"/>
+            <a:ext cx="457200" cy="457200"/>
+          </a:xfrm>
+          <a:prstGeom prst="rect">
+            <a:avLst/>
+          </a:prstGeom>
+          <a:noFill/>
+          <a:ln/>
+        </p:spPr>
+        <p:txBody>
+          <a:bodyPr wrap="square" lIns="0" tIns="0" rIns="0" bIns="0" rtlCol="0" anchor="ctr"/>
+          <a:lstStyle/>
+          <a:p>
+            <a:pPr algn="ctr" indent="0" marL="0">
+              <a:buNone/>
+            </a:pPr>
+            <a:r>
+              <a:rPr lang="en-US" sz="1400" b="1" dirty="0">
+                <a:solidFill>
+                  <a:srgbClr val="FFFFFF"/>
+                </a:solidFill>
+                <a:latin typeface="Arial" pitchFamily="34" charset="0"/>
+                <a:ea typeface="Arial" pitchFamily="34" charset="-122"/>
+                <a:cs typeface="Arial" pitchFamily="34" charset="-120"/>
+              </a:rPr>
+              <a:t>14</a:t>
+            </a:r>
+            <a:endParaRPr lang="en-US" sz="1400" dirty="0"/>
+          </a:p>
+        </p:txBody>
+      </p:sp>
+      <p:sp>
+        <p:nvSpPr>
+          <p:cNvPr id="6" name="Text 4"/>
+          <p:cNvSpPr txBox="1"/>
+          <p:nvPr/>
+        </p:nvSpPr>
+        <p:spPr>
+          <a:xfrm>
+            <a:off x="960120" y="1417320"/>
+            <a:ext cx="9692640" cy="411480"/>
+          </a:xfrm>
+          <a:prstGeom prst="rect">
+            <a:avLst/>
+          </a:prstGeom>
+          <a:noFill/>
+          <a:ln/>
+        </p:spPr>
+        <p:txBody>
+          <a:bodyPr wrap="square" lIns="0" tIns="0" rIns="0" bIns="0" rtlCol="0" anchor="ctr"/>
+          <a:lstStyle/>
+          <a:p>
+            <a:pPr rtl="1" algn="r" indent="0" marL="0">
+              <a:buNone/>
+            </a:pPr>
+            <a:r>
+              <a:rPr lang="en-US" sz="2100" b="1" dirty="0">
+                <a:solidFill>
+                  <a:srgbClr val="5B21B6"/>
+                </a:solidFill>
+                <a:latin typeface="Arial" pitchFamily="34" charset="0"/>
+                <a:ea typeface="Arial" pitchFamily="34" charset="-122"/>
+                <a:cs typeface="Arial" pitchFamily="34" charset="-120"/>
+              </a:rPr>
+              <a:t>ترجيح الدورة الأخيرة</a:t>
+            </a:r>
+            <a:endParaRPr lang="en-US" sz="2100" dirty="0"/>
+          </a:p>
+        </p:txBody>
+      </p:sp>
+      <p:sp>
+        <p:nvSpPr>
+          <p:cNvPr id="7" name="Text 5"/>
+          <p:cNvSpPr txBox="1"/>
+          <p:nvPr/>
+        </p:nvSpPr>
+        <p:spPr>
+          <a:xfrm>
+            <a:off x="960120" y="1901952"/>
+            <a:ext cx="10241280" cy="457200"/>
+          </a:xfrm>
+          <a:prstGeom prst="rect">
+            <a:avLst/>
+          </a:prstGeom>
+          <a:noFill/>
+          <a:ln/>
+        </p:spPr>
+        <p:txBody>
+          <a:bodyPr wrap="square" lIns="0" tIns="0" rIns="0" bIns="0" rtlCol="0" anchor="ctr"/>
+          <a:lstStyle/>
+          <a:p>
+            <a:pPr rtl="1" algn="r" indent="0" marL="0">
+              <a:buNone/>
+            </a:pPr>
+            <a:r>
+              <a:rPr lang="en-US" sz="1350" dirty="0">
+                <a:solidFill>
+                  <a:srgbClr val="292524"/>
+                </a:solidFill>
+                <a:latin typeface="Arial" pitchFamily="34" charset="0"/>
+                <a:ea typeface="Arial" pitchFamily="34" charset="-122"/>
+                <a:cs typeface="Arial" pitchFamily="34" charset="-120"/>
+              </a:rPr>
+              <a:t>تُحتسب الدورة المكتملة الأخيرة بوزن 2.5 — كأنها دورتان ونصف — وباقي الدورات بوزن 1، ولا تدخل دورة الحساب قبل أن يلعبها الستة.</a:t>
+            </a:r>
+            <a:endParaRPr lang="en-US" sz="1350" dirty="0"/>
+          </a:p>
+        </p:txBody>
+      </p:sp>
+      <p:sp>
+        <p:nvSpPr>
+          <p:cNvPr id="8" name="Text 6"/>
+          <p:cNvSpPr txBox="1"/>
+          <p:nvPr/>
+        </p:nvSpPr>
+        <p:spPr>
+          <a:xfrm>
+            <a:off x="960120" y="2395728"/>
+            <a:ext cx="10241280" cy="548640"/>
+          </a:xfrm>
+          <a:prstGeom prst="rect">
+            <a:avLst/>
+          </a:prstGeom>
+          <a:noFill/>
+          <a:ln/>
+        </p:spPr>
+        <p:txBody>
+          <a:bodyPr wrap="square" lIns="0" tIns="0" rIns="0" bIns="0" rtlCol="0" anchor="ctr"/>
+          <a:lstStyle/>
+          <a:p>
+            <a:pPr rtl="1" algn="r" indent="0" marL="0">
+              <a:lnSpc>
+                <a:spcPct val="125000"/>
+              </a:lnSpc>
+              <a:buNone/>
+            </a:pPr>
+            <a:r>
+              <a:rPr lang="en-US" sz="1250" b="1" dirty="0">
+                <a:solidFill>
+                  <a:srgbClr val="6D28D9"/>
+                </a:solidFill>
+                <a:latin typeface="Arial" pitchFamily="34" charset="0"/>
+                <a:ea typeface="Arial" pitchFamily="34" charset="-122"/>
+                <a:cs typeface="Arial" pitchFamily="34" charset="-120"/>
+              </a:rPr>
+              <a:t>الأثر: الدورة الجارية تحسم الترتيب أكثر من كل ما سبقها — من تحسّن يصعد بسرعة، ومن تراجع ينزل بسرعة</a:t>
+            </a:r>
+            <a:endParaRPr lang="en-US" sz="1250" dirty="0"/>
+          </a:p>
+        </p:txBody>
+      </p:sp>
+      <p:sp>
+        <p:nvSpPr>
+          <p:cNvPr id="9" name="Shape 7"/>
+          <p:cNvSpPr/>
+          <p:nvPr/>
+        </p:nvSpPr>
+        <p:spPr>
+          <a:xfrm>
+            <a:off x="640080" y="3520440"/>
+            <a:ext cx="10881360" cy="2377440"/>
+          </a:xfrm>
+          <a:prstGeom prst="roundRect">
+            <a:avLst>
+              <a:gd name="adj" fmla="val 3462"/>
+            </a:avLst>
+          </a:prstGeom>
+          <a:solidFill>
+            <a:srgbClr val="FFE4E6"/>
+          </a:solidFill>
+          <a:ln w="12700">
+            <a:solidFill>
+              <a:srgbClr val="E7E5E4"/>
+            </a:solidFill>
+            <a:prstDash val="solid"/>
+          </a:ln>
+          <a:effectLst>
+            <a:outerShdw sx="100000" sy="100000" kx="0" ky="0" algn="bl" rotWithShape="0" blurRad="101600" dist="12700" dir="5400000">
+              <a:srgbClr val="000000">
+                <a:alpha val="7000"/>
+              </a:srgbClr>
+            </a:outerShdw>
+          </a:effectLst>
+        </p:spPr>
+      </p:sp>
+      <p:sp>
+        <p:nvSpPr>
+          <p:cNvPr id="10" name="Shape 8"/>
+          <p:cNvSpPr/>
+          <p:nvPr/>
+        </p:nvSpPr>
+        <p:spPr>
+          <a:xfrm>
+            <a:off x="10835640" y="3749040"/>
+            <a:ext cx="457200" cy="457200"/>
+          </a:xfrm>
+          <a:prstGeom prst="ellipse">
+            <a:avLst/>
+          </a:prstGeom>
+          <a:solidFill>
+            <a:srgbClr val="E11D48"/>
+          </a:solidFill>
+          <a:ln/>
+        </p:spPr>
+      </p:sp>
+      <p:sp>
+        <p:nvSpPr>
+          <p:cNvPr id="11" name="Text 9"/>
+          <p:cNvSpPr txBox="1"/>
+          <p:nvPr/>
+        </p:nvSpPr>
+        <p:spPr>
+          <a:xfrm>
+            <a:off x="10835640" y="3749040"/>
+            <a:ext cx="457200" cy="457200"/>
+          </a:xfrm>
+          <a:prstGeom prst="rect">
+            <a:avLst/>
+          </a:prstGeom>
+          <a:noFill/>
+          <a:ln/>
+        </p:spPr>
+        <p:txBody>
+          <a:bodyPr wrap="square" lIns="0" tIns="0" rIns="0" bIns="0" rtlCol="0" anchor="ctr"/>
+          <a:lstStyle/>
+          <a:p>
+            <a:pPr algn="ctr" indent="0" marL="0">
+              <a:buNone/>
+            </a:pPr>
+            <a:r>
+              <a:rPr lang="en-US" sz="1400" b="1" dirty="0">
+                <a:solidFill>
+                  <a:srgbClr val="FFFFFF"/>
+                </a:solidFill>
+                <a:latin typeface="Arial" pitchFamily="34" charset="0"/>
+                <a:ea typeface="Arial" pitchFamily="34" charset="-122"/>
+                <a:cs typeface="Arial" pitchFamily="34" charset="-120"/>
+              </a:rPr>
+              <a:t>15</a:t>
+            </a:r>
+            <a:endParaRPr lang="en-US" sz="1400" dirty="0"/>
+          </a:p>
+        </p:txBody>
+      </p:sp>
+      <p:sp>
+        <p:nvSpPr>
+          <p:cNvPr id="12" name="Text 10"/>
+          <p:cNvSpPr txBox="1"/>
+          <p:nvPr/>
+        </p:nvSpPr>
+        <p:spPr>
+          <a:xfrm>
+            <a:off x="960120" y="3749040"/>
+            <a:ext cx="9692640" cy="411480"/>
+          </a:xfrm>
+          <a:prstGeom prst="rect">
+            <a:avLst/>
+          </a:prstGeom>
+          <a:noFill/>
+          <a:ln/>
+        </p:spPr>
+        <p:txBody>
+          <a:bodyPr wrap="square" lIns="0" tIns="0" rIns="0" bIns="0" rtlCol="0" anchor="ctr"/>
+          <a:lstStyle/>
+          <a:p>
+            <a:pPr rtl="1" algn="r" indent="0" marL="0">
+              <a:buNone/>
+            </a:pPr>
+            <a:r>
+              <a:rPr lang="en-US" sz="2100" b="1" dirty="0">
+                <a:solidFill>
+                  <a:srgbClr val="9F1239"/>
+                </a:solidFill>
+                <a:latin typeface="Arial" pitchFamily="34" charset="0"/>
+                <a:ea typeface="Arial" pitchFamily="34" charset="-122"/>
+                <a:cs typeface="Arial" pitchFamily="34" charset="-120"/>
+              </a:rPr>
+              <a:t>بطلان التواطؤ</a:t>
+            </a:r>
+            <a:endParaRPr lang="en-US" sz="2100" dirty="0"/>
+          </a:p>
+        </p:txBody>
+      </p:sp>
+      <p:sp>
+        <p:nvSpPr>
+          <p:cNvPr id="13" name="Text 11"/>
+          <p:cNvSpPr txBox="1"/>
+          <p:nvPr/>
+        </p:nvSpPr>
+        <p:spPr>
+          <a:xfrm>
+            <a:off x="960120" y="4233672"/>
+            <a:ext cx="10241280" cy="502920"/>
+          </a:xfrm>
+          <a:prstGeom prst="rect">
+            <a:avLst/>
+          </a:prstGeom>
+          <a:noFill/>
+          <a:ln/>
+        </p:spPr>
+        <p:txBody>
+          <a:bodyPr wrap="square" lIns="0" tIns="0" rIns="0" bIns="0" rtlCol="0" anchor="ctr"/>
+          <a:lstStyle/>
+          <a:p>
+            <a:pPr rtl="1" algn="r" indent="0" marL="0">
+              <a:buNone/>
+            </a:pPr>
+            <a:r>
+              <a:rPr lang="en-US" sz="1350" dirty="0">
+                <a:solidFill>
+                  <a:srgbClr val="292524"/>
+                </a:solidFill>
+                <a:latin typeface="Arial" pitchFamily="34" charset="0"/>
+                <a:ea typeface="Arial" pitchFamily="34" charset="-122"/>
+                <a:cs typeface="Arial" pitchFamily="34" charset="-120"/>
+              </a:rPr>
+              <a:t>كل اتفاق مسبق على منح درجة محدّدة لشخص بعينه — بصرف النظر عن التجربة — باطل ولا أثر له، سواء أُبرم قبل هذا الدستور أو بعده.</a:t>
+            </a:r>
+            <a:endParaRPr lang="en-US" sz="1350" dirty="0"/>
+          </a:p>
+        </p:txBody>
+      </p:sp>
+      <p:sp>
+        <p:nvSpPr>
+          <p:cNvPr id="14" name="Text 12"/>
+          <p:cNvSpPr txBox="1"/>
+          <p:nvPr/>
+        </p:nvSpPr>
+        <p:spPr>
+          <a:xfrm>
+            <a:off x="960120" y="4773168"/>
+            <a:ext cx="10241280" cy="365760"/>
+          </a:xfrm>
+          <a:prstGeom prst="rect">
+            <a:avLst/>
+          </a:prstGeom>
+          <a:noFill/>
+          <a:ln/>
+        </p:spPr>
+        <p:txBody>
+          <a:bodyPr wrap="square" lIns="0" tIns="0" rIns="0" bIns="0" rtlCol="0" anchor="ctr"/>
+          <a:lstStyle/>
+          <a:p>
+            <a:pPr rtl="1" algn="r" indent="0" marL="0">
+              <a:buNone/>
+            </a:pPr>
+            <a:r>
+              <a:rPr lang="en-US" sz="1250" b="1" dirty="0">
+                <a:solidFill>
+                  <a:srgbClr val="BE123C"/>
+                </a:solidFill>
+                <a:latin typeface="Arial" pitchFamily="34" charset="0"/>
+                <a:ea typeface="Arial" pitchFamily="34" charset="-122"/>
+                <a:cs typeface="Arial" pitchFamily="34" charset="-120"/>
+              </a:rPr>
+              <a:t>الجزاء: يُلغى تقييم المتواطئ على تلك الطلعة، وعند التكرار لبقية الدورة</a:t>
+            </a:r>
+            <a:endParaRPr lang="en-US" sz="1250" dirty="0"/>
+          </a:p>
+        </p:txBody>
+      </p:sp>
+      <p:sp>
+        <p:nvSpPr>
+          <p:cNvPr id="15" name="Text 13"/>
+          <p:cNvSpPr txBox="1"/>
+          <p:nvPr/>
+        </p:nvSpPr>
+        <p:spPr>
+          <a:xfrm>
+            <a:off x="960120" y="5157216"/>
+            <a:ext cx="10241280" cy="457200"/>
+          </a:xfrm>
+          <a:prstGeom prst="rect">
+            <a:avLst/>
+          </a:prstGeom>
+          <a:noFill/>
+          <a:ln/>
+        </p:spPr>
+        <p:txBody>
+          <a:bodyPr wrap="square" lIns="0" tIns="0" rIns="0" bIns="0" rtlCol="0" anchor="ctr"/>
+          <a:lstStyle/>
+          <a:p>
+            <a:pPr rtl="1" algn="r" indent="0" marL="0">
+              <a:buNone/>
+            </a:pPr>
+            <a:r>
+              <a:rPr lang="en-US" sz="1200" dirty="0">
+                <a:solidFill>
+                  <a:srgbClr val="BE123C"/>
+                </a:solidFill>
+                <a:latin typeface="Arial" pitchFamily="34" charset="0"/>
+                <a:ea typeface="Arial" pitchFamily="34" charset="-122"/>
+                <a:cs typeface="Arial" pitchFamily="34" charset="-120"/>
+              </a:rPr>
+              <a:t>القرار بيد العميد وموافقة عضوين، وفق آلية المادة (1)</a:t>
+            </a:r>
+            <a:endParaRPr lang="en-US" sz="1200" dirty="0"/>
+          </a:p>
+        </p:txBody>
+      </p:sp>
+    </p:spTree>
+  </p:cSld>
+  <p:clrMapOvr>
+    <a:masterClrMapping/>
+  </p:clrMapOvr>
+</p:sld>
+</file>
+
+<file path=ppt/slides/slide21.xml><?xml version="1.0" encoding="utf-8"?>
+<p:sld xmlns:a="http://schemas.openxmlformats.org/drawingml/2006/main" xmlns:r="http://schemas.openxmlformats.org/officeDocument/2006/relationships" xmlns:p="http://schemas.openxmlformats.org/presentationml/2006/main">
+  <p:cSld name="Slide 21">
+    <p:bg>
+      <p:bgPr>
+        <a:solidFill>
+          <a:srgbClr val="FAF7F2"/>
+        </a:solidFill>
+      </p:bgPr>
+    </p:bg>
+    <p:spTree>
+      <p:nvGrpSpPr>
+        <p:cNvPr id="1" name=""/>
+        <p:cNvGrpSpPr/>
+        <p:nvPr/>
+      </p:nvGrpSpPr>
+      <p:grpSpPr>
+        <a:xfrm>
+          <a:off x="0" y="0"/>
+          <a:ext cx="0" cy="0"/>
+          <a:chOff x="0" y="0"/>
+          <a:chExt cx="0" cy="0"/>
+        </a:xfrm>
+      </p:grpSpPr>
+      <p:sp>
+        <p:nvSpPr>
+          <p:cNvPr id="2" name="Text 0"/>
+          <p:cNvSpPr txBox="1"/>
+          <p:nvPr/>
+        </p:nvSpPr>
+        <p:spPr>
+          <a:xfrm>
+            <a:off x="640080" y="457200"/>
+            <a:ext cx="10881360" cy="685800"/>
+          </a:xfrm>
+          <a:prstGeom prst="rect">
+            <a:avLst/>
+          </a:prstGeom>
+          <a:noFill/>
+          <a:ln/>
+        </p:spPr>
+        <p:txBody>
+          <a:bodyPr wrap="square" lIns="0" tIns="0" rIns="0" bIns="0" rtlCol="0" anchor="ctr"/>
+          <a:lstStyle/>
+          <a:p>
+            <a:pPr rtl="1" algn="r" indent="0" marL="0">
+              <a:buNone/>
+            </a:pPr>
+            <a:r>
+              <a:rPr lang="en-US" sz="3400" b="1" dirty="0">
+                <a:solidFill>
+                  <a:srgbClr val="292524"/>
+                </a:solidFill>
+                <a:latin typeface="Arial" pitchFamily="34" charset="0"/>
+                <a:ea typeface="Arial" pitchFamily="34" charset="-122"/>
+                <a:cs typeface="Arial" pitchFamily="34" charset="-120"/>
+              </a:rPr>
               <a:t>النتيجة على الأرقام الحقيقية</a:t>
             </a:r>
             <a:endParaRPr lang="en-US" sz="3400" dirty="0"/>
@@ -11424,9 +12547,9 @@
 </p:sld>
 </file>
 
-<file path=ppt/slides/slide21.xml><?xml version="1.0" encoding="utf-8"?>
+<file path=ppt/slides/slide22.xml><?xml version="1.0" encoding="utf-8"?>
 <p:sld xmlns:a="http://schemas.openxmlformats.org/drawingml/2006/main" xmlns:r="http://schemas.openxmlformats.org/officeDocument/2006/relationships" xmlns:p="http://schemas.openxmlformats.org/presentationml/2006/main">
-  <p:cSld name="Slide 21">
+  <p:cSld name="Slide 22">
     <p:bg>
       <p:bgPr>
         <a:solidFill>

--- a/deck/دستور-عرش-الخميس-v12.pptx
+++ b/deck/دستور-عرش-الخميس-v12.pptx
@@ -3947,7 +3947,7 @@
           <a:p>
             <a:r>
               <a:rPr lang="en-US" dirty="0"/>
-              <a:t>مقدّمة العرض — عدّل النص كما تشاء، التنسيق يتكيّف.</a:t>
+              <a:t>مقدّمة بأسلوب المخاطبات — عدّل النص كما تشاء.</a:t>
             </a:r>
             <a:endParaRPr lang="en-US" dirty="0"/>
           </a:p>
@@ -10230,7 +10230,7 @@
     <p:bg>
       <p:bgPr>
         <a:solidFill>
-          <a:srgbClr val="1C1917"/>
+          <a:srgbClr val="F7F1E3"/>
         </a:solidFill>
       </p:bgPr>
     </p:bg>
@@ -10256,180 +10256,18 @@
         </p:nvSpPr>
         <p:spPr>
           <a:xfrm>
-            <a:off x="-4206240" y="-3291840"/>
-            <a:ext cx="7315200" cy="7315200"/>
+            <a:off x="10469880" y="457200"/>
+            <a:ext cx="1051560" cy="1051560"/>
           </a:xfrm>
           <a:prstGeom prst="ellipse">
             <a:avLst/>
           </a:prstGeom>
           <a:solidFill>
-            <a:srgbClr val="241E16"/>
+            <a:srgbClr val="F3E3BE"/>
           </a:solidFill>
-          <a:ln/>
-        </p:spPr>
-      </p:sp>
-      <p:sp>
-        <p:nvSpPr>
-          <p:cNvPr id="3" name="Shape 1"/>
-          <p:cNvSpPr/>
-          <p:nvPr/>
-        </p:nvSpPr>
-        <p:spPr>
-          <a:xfrm>
-            <a:off x="10332720" y="4206240"/>
-            <a:ext cx="6400800" cy="6400800"/>
-          </a:xfrm>
-          <a:prstGeom prst="ellipse">
-            <a:avLst/>
-          </a:prstGeom>
-          <a:solidFill>
-            <a:srgbClr val="241E16"/>
-          </a:solidFill>
-          <a:ln/>
-        </p:spPr>
-      </p:sp>
-      <p:sp>
-        <p:nvSpPr>
-          <p:cNvPr id="4" name="Text 2"/>
-          <p:cNvSpPr txBox="1"/>
-          <p:nvPr/>
-        </p:nvSpPr>
-        <p:spPr>
-          <a:xfrm>
-            <a:off x="640080" y="566928"/>
-            <a:ext cx="10881360" cy="411480"/>
-          </a:xfrm>
-          <a:prstGeom prst="rect">
-            <a:avLst/>
-          </a:prstGeom>
-          <a:noFill/>
-          <a:ln/>
-        </p:spPr>
-        <p:txBody>
-          <a:bodyPr wrap="square" lIns="0" tIns="0" rIns="0" bIns="0" rtlCol="0" anchor="ctr"/>
-          <a:lstStyle/>
-          <a:p>
-            <a:pPr rtl="1" algn="r" indent="0" marL="0">
-              <a:buNone/>
-            </a:pPr>
-            <a:r>
-              <a:rPr lang="en-US" sz="1500" b="1" dirty="0">
-                <a:solidFill>
-                  <a:srgbClr val="F59E0B"/>
-                </a:solidFill>
-                <a:latin typeface="Arial" pitchFamily="34" charset="0"/>
-                <a:ea typeface="Arial" pitchFamily="34" charset="-122"/>
-                <a:cs typeface="Arial" pitchFamily="34" charset="-120"/>
-              </a:rPr>
-              <a:t>مقدّمة</a:t>
-            </a:r>
-            <a:endParaRPr lang="en-US" sz="1500" dirty="0"/>
-          </a:p>
-        </p:txBody>
-      </p:sp>
-      <p:sp>
-        <p:nvSpPr>
-          <p:cNvPr id="5" name="Text 3"/>
-          <p:cNvSpPr txBox="1"/>
-          <p:nvPr/>
-        </p:nvSpPr>
-        <p:spPr>
-          <a:xfrm>
-            <a:off x="640080" y="1078992"/>
-            <a:ext cx="10881360" cy="777240"/>
-          </a:xfrm>
-          <a:prstGeom prst="rect">
-            <a:avLst/>
-          </a:prstGeom>
-          <a:noFill/>
-          <a:ln/>
-        </p:spPr>
-        <p:txBody>
-          <a:bodyPr wrap="square" lIns="0" tIns="0" rIns="0" bIns="0" rtlCol="0" anchor="ctr"/>
-          <a:lstStyle/>
-          <a:p>
-            <a:pPr rtl="1" algn="r" indent="0" marL="0">
-              <a:buNone/>
-            </a:pPr>
-            <a:r>
-              <a:rPr lang="en-US" sz="4000" b="1" dirty="0">
-                <a:solidFill>
-                  <a:srgbClr val="F5F5F4"/>
-                </a:solidFill>
-                <a:latin typeface="Arial" pitchFamily="34" charset="0"/>
-                <a:ea typeface="Arial" pitchFamily="34" charset="-122"/>
-                <a:cs typeface="Arial" pitchFamily="34" charset="-120"/>
-              </a:rPr>
-              <a:t>لم تكن لعبة… حتى صارت دولة</a:t>
-            </a:r>
-            <a:endParaRPr lang="en-US" sz="4000" dirty="0"/>
-          </a:p>
-        </p:txBody>
-      </p:sp>
-      <p:sp>
-        <p:nvSpPr>
-          <p:cNvPr id="6" name="Text 4"/>
-          <p:cNvSpPr txBox="1"/>
-          <p:nvPr/>
-        </p:nvSpPr>
-        <p:spPr>
-          <a:xfrm>
-            <a:off x="640080" y="2057400"/>
-            <a:ext cx="10698480" cy="868680"/>
-          </a:xfrm>
-          <a:prstGeom prst="rect">
-            <a:avLst/>
-          </a:prstGeom>
-          <a:noFill/>
-          <a:ln/>
-        </p:spPr>
-        <p:txBody>
-          <a:bodyPr wrap="square" lIns="0" tIns="0" rIns="0" bIns="0" rtlCol="0" anchor="ctr"/>
-          <a:lstStyle/>
-          <a:p>
-            <a:pPr rtl="1" algn="r" indent="0" marL="0">
-              <a:lnSpc>
-                <a:spcPct val="145000"/>
-              </a:lnSpc>
-              <a:buNone/>
-            </a:pPr>
-            <a:r>
-              <a:rPr lang="en-US" sz="1700" dirty="0">
-                <a:solidFill>
-                  <a:srgbClr val="D6D3D1"/>
-                </a:solidFill>
-                <a:latin typeface="Arial" pitchFamily="34" charset="0"/>
-                <a:ea typeface="Arial" pitchFamily="34" charset="-122"/>
-                <a:cs typeface="Arial" pitchFamily="34" charset="-120"/>
-              </a:rPr>
-              <a:t>في مساء خميسٍ عادي، اجتمع ستة على مائدة. لم يخطر لأحدهم أن اختيار مطعمٍ قد يصير عرشاً يتناوبون عليه، وله ملوكٌ ودورات وقائمة شرف.</a:t>
-            </a:r>
-            <a:endParaRPr lang="en-US" sz="1700" dirty="0"/>
-          </a:p>
-        </p:txBody>
-      </p:sp>
-      <p:sp>
-        <p:nvSpPr>
-          <p:cNvPr id="7" name="Shape 5"/>
-          <p:cNvSpPr/>
-          <p:nvPr/>
-        </p:nvSpPr>
-        <p:spPr>
-          <a:xfrm>
-            <a:off x="8077200" y="3127248"/>
-            <a:ext cx="3444240" cy="1051560"/>
-          </a:xfrm>
-          <a:prstGeom prst="roundRect">
-            <a:avLst>
-              <a:gd name="adj" fmla="val 8696"/>
-            </a:avLst>
-          </a:prstGeom>
-          <a:solidFill>
-            <a:srgbClr val="241F1B"/>
-          </a:solidFill>
-          <a:ln w="12700">
+          <a:ln w="25400">
             <a:solidFill>
-              <a:srgbClr val="4A3F2E"/>
+              <a:srgbClr val="C9A227"/>
             </a:solidFill>
             <a:prstDash val="solid"/>
           </a:ln>
@@ -10437,14 +10275,14 @@
       </p:sp>
       <p:sp>
         <p:nvSpPr>
-          <p:cNvPr id="8" name="Text 6"/>
-          <p:cNvSpPr txBox="1"/>
-          <p:nvPr/>
-        </p:nvSpPr>
-        <p:spPr>
-          <a:xfrm>
-            <a:off x="8077200" y="3246120"/>
-            <a:ext cx="3444240" cy="548640"/>
+          <p:cNvPr id="3" name="Text 1"/>
+          <p:cNvSpPr txBox="1"/>
+          <p:nvPr/>
+        </p:nvSpPr>
+        <p:spPr>
+          <a:xfrm>
+            <a:off x="10469880" y="457200"/>
+            <a:ext cx="1051560" cy="1051560"/>
           </a:xfrm>
           <a:prstGeom prst="rect">
             <a:avLst/>
@@ -10457,282 +10295,173 @@
           <a:lstStyle/>
           <a:p>
             <a:pPr algn="ctr" indent="0" marL="0">
-              <a:buNone/>
-            </a:pPr>
-            <a:r>
-              <a:rPr lang="en-US" sz="3200" b="1" dirty="0">
-                <a:solidFill>
-                  <a:srgbClr val="F59E0B"/>
-                </a:solidFill>
-                <a:latin typeface="Arial" pitchFamily="34" charset="0"/>
-                <a:ea typeface="Arial" pitchFamily="34" charset="-122"/>
-                <a:cs typeface="Arial" pitchFamily="34" charset="-120"/>
-              </a:rPr>
-              <a:t>31</a:t>
-            </a:r>
-            <a:endParaRPr lang="en-US" sz="3200" dirty="0"/>
-          </a:p>
-        </p:txBody>
-      </p:sp>
-      <p:sp>
-        <p:nvSpPr>
-          <p:cNvPr id="9" name="Text 7"/>
-          <p:cNvSpPr txBox="1"/>
-          <p:nvPr/>
-        </p:nvSpPr>
-        <p:spPr>
-          <a:xfrm>
-            <a:off x="8077200" y="3767328"/>
-            <a:ext cx="3444240" cy="310896"/>
-          </a:xfrm>
-          <a:prstGeom prst="rect">
-            <a:avLst/>
-          </a:prstGeom>
-          <a:noFill/>
-          <a:ln/>
-        </p:spPr>
-        <p:txBody>
-          <a:bodyPr wrap="square" lIns="0" tIns="0" rIns="0" bIns="0" rtlCol="0" anchor="ctr"/>
-          <a:lstStyle/>
+              <a:lnSpc>
+                <a:spcPct val="110000"/>
+              </a:lnSpc>
+              <a:buNone/>
+            </a:pPr>
+            <a:r>
+              <a:rPr lang="en-US" sz="1100" b="1" dirty="0">
+                <a:solidFill>
+                  <a:srgbClr val="9A7B12"/>
+                </a:solidFill>
+                <a:latin typeface="Arial" pitchFamily="34" charset="0"/>
+                <a:ea typeface="Arial" pitchFamily="34" charset="-122"/>
+                <a:cs typeface="Arial" pitchFamily="34" charset="-120"/>
+              </a:rPr>
+              <a:t>عرش</a:t>
+            </a:r>
+            <a:endParaRPr lang="en-US" sz="1100" dirty="0"/>
+          </a:p>
           <a:p>
             <a:pPr algn="ctr" indent="0" marL="0">
-              <a:buNone/>
-            </a:pPr>
-            <a:r>
-              <a:rPr lang="en-US" sz="1300" dirty="0">
-                <a:solidFill>
-                  <a:srgbClr val="78716C"/>
-                </a:solidFill>
-                <a:latin typeface="Arial" pitchFamily="34" charset="0"/>
-                <a:ea typeface="Arial" pitchFamily="34" charset="-122"/>
-                <a:cs typeface="Arial" pitchFamily="34" charset="-120"/>
-              </a:rPr>
-              <a:t>طلعة</a:t>
-            </a:r>
-            <a:endParaRPr lang="en-US" sz="1300" dirty="0"/>
-          </a:p>
-        </p:txBody>
-      </p:sp>
-      <p:sp>
-        <p:nvSpPr>
-          <p:cNvPr id="10" name="Shape 8"/>
-          <p:cNvSpPr/>
-          <p:nvPr/>
-        </p:nvSpPr>
-        <p:spPr>
-          <a:xfrm>
-            <a:off x="4358640" y="3127248"/>
-            <a:ext cx="3444240" cy="1051560"/>
-          </a:xfrm>
-          <a:prstGeom prst="roundRect">
-            <a:avLst>
-              <a:gd name="adj" fmla="val 8696"/>
-            </a:avLst>
-          </a:prstGeom>
-          <a:solidFill>
-            <a:srgbClr val="241F1B"/>
-          </a:solidFill>
-          <a:ln w="12700">
-            <a:solidFill>
-              <a:srgbClr val="4A3F2E"/>
-            </a:solidFill>
-            <a:prstDash val="solid"/>
-          </a:ln>
-        </p:spPr>
-      </p:sp>
-      <p:sp>
-        <p:nvSpPr>
-          <p:cNvPr id="11" name="Text 9"/>
-          <p:cNvSpPr txBox="1"/>
-          <p:nvPr/>
-        </p:nvSpPr>
-        <p:spPr>
-          <a:xfrm>
-            <a:off x="4358640" y="3246120"/>
-            <a:ext cx="3444240" cy="548640"/>
-          </a:xfrm>
-          <a:prstGeom prst="rect">
-            <a:avLst/>
-          </a:prstGeom>
-          <a:noFill/>
-          <a:ln/>
-        </p:spPr>
-        <p:txBody>
-          <a:bodyPr wrap="square" lIns="0" tIns="0" rIns="0" bIns="0" rtlCol="0" anchor="ctr"/>
-          <a:lstStyle/>
-          <a:p>
-            <a:pPr algn="ctr" indent="0" marL="0">
-              <a:buNone/>
-            </a:pPr>
-            <a:r>
-              <a:rPr lang="en-US" sz="3200" b="1" dirty="0">
-                <a:solidFill>
-                  <a:srgbClr val="F59E0B"/>
-                </a:solidFill>
-                <a:latin typeface="Arial" pitchFamily="34" charset="0"/>
-                <a:ea typeface="Arial" pitchFamily="34" charset="-122"/>
-                <a:cs typeface="Arial" pitchFamily="34" charset="-120"/>
-              </a:rPr>
-              <a:t>26</a:t>
-            </a:r>
-            <a:endParaRPr lang="en-US" sz="3200" dirty="0"/>
-          </a:p>
-        </p:txBody>
-      </p:sp>
-      <p:sp>
-        <p:nvSpPr>
-          <p:cNvPr id="12" name="Text 10"/>
-          <p:cNvSpPr txBox="1"/>
-          <p:nvPr/>
-        </p:nvSpPr>
-        <p:spPr>
-          <a:xfrm>
-            <a:off x="4358640" y="3767328"/>
-            <a:ext cx="3444240" cy="310896"/>
-          </a:xfrm>
-          <a:prstGeom prst="rect">
-            <a:avLst/>
-          </a:prstGeom>
-          <a:noFill/>
-          <a:ln/>
-        </p:spPr>
-        <p:txBody>
-          <a:bodyPr wrap="square" lIns="0" tIns="0" rIns="0" bIns="0" rtlCol="0" anchor="ctr"/>
-          <a:lstStyle/>
-          <a:p>
-            <a:pPr algn="ctr" indent="0" marL="0">
-              <a:buNone/>
-            </a:pPr>
-            <a:r>
-              <a:rPr lang="en-US" sz="1300" dirty="0">
-                <a:solidFill>
-                  <a:srgbClr val="78716C"/>
-                </a:solidFill>
-                <a:latin typeface="Arial" pitchFamily="34" charset="0"/>
-                <a:ea typeface="Arial" pitchFamily="34" charset="-122"/>
-                <a:cs typeface="Arial" pitchFamily="34" charset="-120"/>
-              </a:rPr>
-              <a:t>مطعماً</a:t>
-            </a:r>
-            <a:endParaRPr lang="en-US" sz="1300" dirty="0"/>
-          </a:p>
-        </p:txBody>
-      </p:sp>
-      <p:sp>
-        <p:nvSpPr>
-          <p:cNvPr id="13" name="Shape 11"/>
-          <p:cNvSpPr/>
-          <p:nvPr/>
-        </p:nvSpPr>
-        <p:spPr>
-          <a:xfrm>
-            <a:off x="640080" y="3127248"/>
-            <a:ext cx="3444240" cy="1051560"/>
-          </a:xfrm>
-          <a:prstGeom prst="roundRect">
-            <a:avLst>
-              <a:gd name="adj" fmla="val 8696"/>
-            </a:avLst>
-          </a:prstGeom>
-          <a:solidFill>
-            <a:srgbClr val="241F1B"/>
-          </a:solidFill>
-          <a:ln w="12700">
-            <a:solidFill>
-              <a:srgbClr val="4A3F2E"/>
-            </a:solidFill>
-            <a:prstDash val="solid"/>
-          </a:ln>
-        </p:spPr>
-      </p:sp>
-      <p:sp>
-        <p:nvSpPr>
-          <p:cNvPr id="14" name="Text 12"/>
-          <p:cNvSpPr txBox="1"/>
-          <p:nvPr/>
-        </p:nvSpPr>
-        <p:spPr>
-          <a:xfrm>
-            <a:off x="640080" y="3246120"/>
-            <a:ext cx="3444240" cy="548640"/>
-          </a:xfrm>
-          <a:prstGeom prst="rect">
-            <a:avLst/>
-          </a:prstGeom>
-          <a:noFill/>
-          <a:ln/>
-        </p:spPr>
-        <p:txBody>
-          <a:bodyPr wrap="square" lIns="0" tIns="0" rIns="0" bIns="0" rtlCol="0" anchor="ctr"/>
-          <a:lstStyle/>
-          <a:p>
-            <a:pPr algn="ctr" indent="0" marL="0">
-              <a:buNone/>
-            </a:pPr>
-            <a:r>
-              <a:rPr lang="en-US" sz="3200" b="1" dirty="0">
-                <a:solidFill>
-                  <a:srgbClr val="F59E0B"/>
-                </a:solidFill>
-                <a:latin typeface="Arial" pitchFamily="34" charset="0"/>
-                <a:ea typeface="Arial" pitchFamily="34" charset="-122"/>
-                <a:cs typeface="Arial" pitchFamily="34" charset="-120"/>
-              </a:rPr>
-              <a:t>94</a:t>
-            </a:r>
-            <a:endParaRPr lang="en-US" sz="3200" dirty="0"/>
-          </a:p>
-        </p:txBody>
-      </p:sp>
-      <p:sp>
-        <p:nvSpPr>
-          <p:cNvPr id="15" name="Text 13"/>
-          <p:cNvSpPr txBox="1"/>
-          <p:nvPr/>
-        </p:nvSpPr>
-        <p:spPr>
-          <a:xfrm>
-            <a:off x="640080" y="3767328"/>
-            <a:ext cx="3444240" cy="310896"/>
-          </a:xfrm>
-          <a:prstGeom prst="rect">
-            <a:avLst/>
-          </a:prstGeom>
-          <a:noFill/>
-          <a:ln/>
-        </p:spPr>
-        <p:txBody>
-          <a:bodyPr wrap="square" lIns="0" tIns="0" rIns="0" bIns="0" rtlCol="0" anchor="ctr"/>
-          <a:lstStyle/>
-          <a:p>
-            <a:pPr algn="ctr" indent="0" marL="0">
-              <a:buNone/>
-            </a:pPr>
-            <a:r>
-              <a:rPr lang="en-US" sz="1300" dirty="0">
-                <a:solidFill>
-                  <a:srgbClr val="78716C"/>
-                </a:solidFill>
-                <a:latin typeface="Arial" pitchFamily="34" charset="0"/>
-                <a:ea typeface="Arial" pitchFamily="34" charset="-122"/>
-                <a:cs typeface="Arial" pitchFamily="34" charset="-120"/>
-              </a:rPr>
-              <a:t>تقييماً</a:t>
-            </a:r>
-            <a:endParaRPr lang="en-US" sz="1300" dirty="0"/>
-          </a:p>
-        </p:txBody>
-      </p:sp>
-      <p:sp>
-        <p:nvSpPr>
-          <p:cNvPr id="16" name="Text 14"/>
-          <p:cNvSpPr txBox="1"/>
-          <p:nvPr/>
-        </p:nvSpPr>
-        <p:spPr>
-          <a:xfrm>
-            <a:off x="640080" y="4498848"/>
-            <a:ext cx="10698480" cy="868680"/>
+              <a:lnSpc>
+                <a:spcPct val="110000"/>
+              </a:lnSpc>
+              <a:buNone/>
+            </a:pPr>
+            <a:r>
+              <a:rPr lang="en-US" sz="1100" b="1" dirty="0">
+                <a:solidFill>
+                  <a:srgbClr val="9A7B12"/>
+                </a:solidFill>
+                <a:latin typeface="Arial" pitchFamily="34" charset="0"/>
+                <a:ea typeface="Arial" pitchFamily="34" charset="-122"/>
+                <a:cs typeface="Arial" pitchFamily="34" charset="-120"/>
+              </a:rPr>
+              <a:t>الخميس</a:t>
+            </a:r>
+            <a:endParaRPr lang="en-US" sz="1100" dirty="0"/>
+          </a:p>
+        </p:txBody>
+      </p:sp>
+      <p:sp>
+        <p:nvSpPr>
+          <p:cNvPr id="4" name="Text 2"/>
+          <p:cNvSpPr txBox="1"/>
+          <p:nvPr/>
+        </p:nvSpPr>
+        <p:spPr>
+          <a:xfrm>
+            <a:off x="640080" y="658368"/>
+            <a:ext cx="9418320" cy="457200"/>
+          </a:xfrm>
+          <a:prstGeom prst="rect">
+            <a:avLst/>
+          </a:prstGeom>
+          <a:noFill/>
+          <a:ln/>
+        </p:spPr>
+        <p:txBody>
+          <a:bodyPr wrap="square" lIns="0" tIns="0" rIns="0" bIns="0" rtlCol="0" anchor="ctr"/>
+          <a:lstStyle/>
+          <a:p>
+            <a:pPr rtl="1" algn="r" indent="0" marL="0">
+              <a:buNone/>
+            </a:pPr>
+            <a:r>
+              <a:rPr lang="en-US" sz="1900" b="1" dirty="0">
+                <a:solidFill>
+                  <a:srgbClr val="9A7B12"/>
+                </a:solidFill>
+                <a:latin typeface="Arial" pitchFamily="34" charset="0"/>
+                <a:ea typeface="Arial" pitchFamily="34" charset="-122"/>
+                <a:cs typeface="Arial" pitchFamily="34" charset="-120"/>
+              </a:rPr>
+              <a:t>مِن عميدِ الدستور شوكا، إلى ملوكِ عرشِ الخميس</a:t>
+            </a:r>
+            <a:endParaRPr lang="en-US" sz="1900" dirty="0"/>
+          </a:p>
+        </p:txBody>
+      </p:sp>
+      <p:sp>
+        <p:nvSpPr>
+          <p:cNvPr id="5" name="Text 3"/>
+          <p:cNvSpPr txBox="1"/>
+          <p:nvPr/>
+        </p:nvSpPr>
+        <p:spPr>
+          <a:xfrm>
+            <a:off x="640080" y="1417320"/>
+            <a:ext cx="10881360" cy="868680"/>
+          </a:xfrm>
+          <a:prstGeom prst="rect">
+            <a:avLst/>
+          </a:prstGeom>
+          <a:noFill/>
+          <a:ln/>
+        </p:spPr>
+        <p:txBody>
+          <a:bodyPr wrap="square" lIns="0" tIns="0" rIns="0" bIns="0" rtlCol="0" anchor="ctr"/>
+          <a:lstStyle/>
+          <a:p>
+            <a:pPr rtl="1" algn="r" indent="0" marL="0">
+              <a:buNone/>
+            </a:pPr>
+            <a:r>
+              <a:rPr lang="en-US" sz="4400" b="1" dirty="0">
+                <a:solidFill>
+                  <a:srgbClr val="3B2F1E"/>
+                </a:solidFill>
+                <a:latin typeface="Arial" pitchFamily="34" charset="0"/>
+                <a:ea typeface="Arial" pitchFamily="34" charset="-122"/>
+                <a:cs typeface="Arial" pitchFamily="34" charset="-120"/>
+              </a:rPr>
+              <a:t>السلامُ على مَنِ اتّبعَ الهُدى</a:t>
+            </a:r>
+            <a:endParaRPr lang="en-US" sz="4400" dirty="0"/>
+          </a:p>
+        </p:txBody>
+      </p:sp>
+      <p:sp>
+        <p:nvSpPr>
+          <p:cNvPr id="6" name="Text 4"/>
+          <p:cNvSpPr txBox="1"/>
+          <p:nvPr/>
+        </p:nvSpPr>
+        <p:spPr>
+          <a:xfrm>
+            <a:off x="640080" y="2395728"/>
+            <a:ext cx="10881360" cy="411480"/>
+          </a:xfrm>
+          <a:prstGeom prst="rect">
+            <a:avLst/>
+          </a:prstGeom>
+          <a:noFill/>
+          <a:ln/>
+        </p:spPr>
+        <p:txBody>
+          <a:bodyPr wrap="square" lIns="0" tIns="0" rIns="0" bIns="0" rtlCol="0" anchor="ctr"/>
+          <a:lstStyle/>
+          <a:p>
+            <a:pPr rtl="1" algn="r" indent="0" marL="0">
+              <a:buNone/>
+            </a:pPr>
+            <a:r>
+              <a:rPr lang="en-US" sz="2000" b="1" dirty="0">
+                <a:solidFill>
+                  <a:srgbClr val="9A7B12"/>
+                </a:solidFill>
+                <a:latin typeface="Arial" pitchFamily="34" charset="0"/>
+                <a:ea typeface="Arial" pitchFamily="34" charset="-122"/>
+                <a:cs typeface="Arial" pitchFamily="34" charset="-120"/>
+              </a:rPr>
+              <a:t>أمّا بعد،</a:t>
+            </a:r>
+            <a:endParaRPr lang="en-US" sz="2000" dirty="0"/>
+          </a:p>
+        </p:txBody>
+      </p:sp>
+      <p:sp>
+        <p:nvSpPr>
+          <p:cNvPr id="7" name="Text 5"/>
+          <p:cNvSpPr txBox="1"/>
+          <p:nvPr/>
+        </p:nvSpPr>
+        <p:spPr>
+          <a:xfrm>
+            <a:off x="640080" y="2880360"/>
+            <a:ext cx="10881360" cy="1051560"/>
           </a:xfrm>
           <a:prstGeom prst="rect">
             <a:avLst/>
@@ -10746,35 +10475,35 @@
           <a:p>
             <a:pPr rtl="1" algn="r" indent="0" marL="0">
               <a:lnSpc>
-                <a:spcPct val="145000"/>
+                <a:spcPct val="150000"/>
               </a:lnSpc>
               <a:buNone/>
             </a:pPr>
             <a:r>
-              <a:rPr lang="en-US" sz="1700" dirty="0">
-                <a:solidFill>
-                  <a:srgbClr val="D6D3D1"/>
-                </a:solidFill>
-                <a:latin typeface="Arial" pitchFamily="34" charset="0"/>
-                <a:ea typeface="Arial" pitchFamily="34" charset="-122"/>
-                <a:cs typeface="Arial" pitchFamily="34" charset="-120"/>
-              </a:rPr>
-              <a:t>وحين كبرت اللعبة كبرت معها خلافاتها، فلم يعد الذوق وحده يكفي. صار لا بدّ من ميزانٍ يرضاه الجميع قبل أن يعرفوا لمن سيميل.</a:t>
-            </a:r>
-            <a:endParaRPr lang="en-US" sz="1700" dirty="0"/>
-          </a:p>
-        </p:txBody>
-      </p:sp>
-      <p:sp>
-        <p:nvSpPr>
-          <p:cNvPr id="17" name="Text 15"/>
-          <p:cNvSpPr txBox="1"/>
-          <p:nvPr/>
-        </p:nvSpPr>
-        <p:spPr>
-          <a:xfrm>
-            <a:off x="640080" y="5532120"/>
-            <a:ext cx="10881360" cy="548640"/>
+              <a:rPr lang="en-US" sz="1600" dirty="0">
+                <a:solidFill>
+                  <a:srgbClr val="3B2F1E"/>
+                </a:solidFill>
+                <a:latin typeface="Arial" pitchFamily="34" charset="0"/>
+                <a:ea typeface="Arial" pitchFamily="34" charset="-122"/>
+                <a:cs typeface="Arial" pitchFamily="34" charset="-120"/>
+              </a:rPr>
+              <a:t>فإنّا جمعنا إحدى وثلاثين طلعةً وأربعةً وتسعين تقييماً، ونظرنا فيها نظرَ المُنصِف، فوجدنا الميزانَ يميلُ بغير ما يشتهي أصحابُه: مقياسٌ عند هذا غيرُ مقياسِ ذاك، وطلعةٌ واحدةٌ تَهدِمُ عاماً كاملاً، وخصومةٌ بين اثنين يدفعُ ثمنَها الستة.</a:t>
+            </a:r>
+            <a:endParaRPr lang="en-US" sz="1600" dirty="0"/>
+          </a:p>
+        </p:txBody>
+      </p:sp>
+      <p:sp>
+        <p:nvSpPr>
+          <p:cNvPr id="8" name="Text 6"/>
+          <p:cNvSpPr txBox="1"/>
+          <p:nvPr/>
+        </p:nvSpPr>
+        <p:spPr>
+          <a:xfrm>
+            <a:off x="640080" y="4069080"/>
+            <a:ext cx="10881360" cy="868680"/>
           </a:xfrm>
           <a:prstGeom prst="rect">
             <a:avLst/>
@@ -10787,33 +10516,56 @@
           <a:lstStyle/>
           <a:p>
             <a:pPr rtl="1" algn="r" indent="0" marL="0">
-              <a:buNone/>
-            </a:pPr>
-            <a:r>
-              <a:rPr lang="en-US" sz="2300" b="1" dirty="0">
-                <a:solidFill>
-                  <a:srgbClr val="F59E0B"/>
-                </a:solidFill>
-                <a:latin typeface="Arial" pitchFamily="34" charset="0"/>
-                <a:ea typeface="Arial" pitchFamily="34" charset="-122"/>
-                <a:cs typeface="Arial" pitchFamily="34" charset="-120"/>
-              </a:rPr>
-              <a:t>هذا الدستور ليس قيداً على أحد — بل ضمانٌ ألّا يُظلم أحد.</a:t>
-            </a:r>
-            <a:endParaRPr lang="en-US" sz="2300" dirty="0"/>
-          </a:p>
-        </p:txBody>
-      </p:sp>
-      <p:sp>
-        <p:nvSpPr>
-          <p:cNvPr id="18" name="Text 16"/>
-          <p:cNvSpPr txBox="1"/>
-          <p:nvPr/>
-        </p:nvSpPr>
-        <p:spPr>
-          <a:xfrm>
-            <a:off x="640080" y="6199632"/>
-            <a:ext cx="10881360" cy="365760"/>
+              <a:lnSpc>
+                <a:spcPct val="150000"/>
+              </a:lnSpc>
+              <a:buNone/>
+            </a:pPr>
+            <a:r>
+              <a:rPr lang="en-US" sz="1600" dirty="0">
+                <a:solidFill>
+                  <a:srgbClr val="3B2F1E"/>
+                </a:solidFill>
+                <a:latin typeface="Arial" pitchFamily="34" charset="0"/>
+                <a:ea typeface="Arial" pitchFamily="34" charset="-122"/>
+                <a:cs typeface="Arial" pitchFamily="34" charset="-120"/>
+              </a:rPr>
+              <a:t>وإنّا ندعوكم إلى ميزانٍ واحدٍ ترضونه قبل أن تعلموا لمن سيميل. فإن قَبِلتُم سَلِمَت الشِّلّةُ وبقيت الطلعات، وإن أبَيتُم فما بعد الأرقامِ حُجّة.</a:t>
+            </a:r>
+            <a:endParaRPr lang="en-US" sz="1600" dirty="0"/>
+          </a:p>
+        </p:txBody>
+      </p:sp>
+      <p:sp>
+        <p:nvSpPr>
+          <p:cNvPr id="9" name="Shape 7"/>
+          <p:cNvSpPr/>
+          <p:nvPr/>
+        </p:nvSpPr>
+        <p:spPr>
+          <a:xfrm>
+            <a:off x="9144000" y="5138928"/>
+            <a:ext cx="2377440" cy="13716"/>
+          </a:xfrm>
+          <a:prstGeom prst="rect">
+            <a:avLst/>
+          </a:prstGeom>
+          <a:solidFill>
+            <a:srgbClr val="D6C7A1"/>
+          </a:solidFill>
+          <a:ln/>
+        </p:spPr>
+      </p:sp>
+      <p:sp>
+        <p:nvSpPr>
+          <p:cNvPr id="10" name="Text 8"/>
+          <p:cNvSpPr txBox="1"/>
+          <p:nvPr/>
+        </p:nvSpPr>
+        <p:spPr>
+          <a:xfrm>
+            <a:off x="640080" y="5349240"/>
+            <a:ext cx="10881360" cy="594360"/>
           </a:xfrm>
           <a:prstGeom prst="rect">
             <a:avLst/>
@@ -10829,17 +10581,56 @@
               <a:buNone/>
             </a:pPr>
             <a:r>
-              <a:rPr lang="en-US" sz="1300" dirty="0">
-                <a:solidFill>
-                  <a:srgbClr val="78716C"/>
-                </a:solidFill>
-                <a:latin typeface="Arial" pitchFamily="34" charset="0"/>
-                <a:ea typeface="Arial" pitchFamily="34" charset="-122"/>
-                <a:cs typeface="Arial" pitchFamily="34" charset="-120"/>
-              </a:rPr>
-              <a:t>عميد الدستور  ·  شوكا</a:t>
-            </a:r>
-            <a:endParaRPr lang="en-US" sz="1300" dirty="0"/>
+              <a:rPr lang="en-US" sz="3000" b="1" dirty="0">
+                <a:solidFill>
+                  <a:srgbClr val="9A7B12"/>
+                </a:solidFill>
+                <a:latin typeface="Arial" pitchFamily="34" charset="0"/>
+                <a:ea typeface="Arial" pitchFamily="34" charset="-122"/>
+                <a:cs typeface="Arial" pitchFamily="34" charset="-120"/>
+              </a:rPr>
+              <a:t>وقد أَعذَرَ مَن أَنذَر.</a:t>
+            </a:r>
+            <a:endParaRPr lang="en-US" sz="3000" dirty="0"/>
+          </a:p>
+        </p:txBody>
+      </p:sp>
+      <p:sp>
+        <p:nvSpPr>
+          <p:cNvPr id="11" name="Text 9"/>
+          <p:cNvSpPr txBox="1"/>
+          <p:nvPr/>
+        </p:nvSpPr>
+        <p:spPr>
+          <a:xfrm>
+            <a:off x="640080" y="6108192"/>
+            <a:ext cx="10881360" cy="411480"/>
+          </a:xfrm>
+          <a:prstGeom prst="rect">
+            <a:avLst/>
+          </a:prstGeom>
+          <a:noFill/>
+          <a:ln/>
+        </p:spPr>
+        <p:txBody>
+          <a:bodyPr wrap="square" lIns="0" tIns="0" rIns="0" bIns="0" rtlCol="0" anchor="ctr"/>
+          <a:lstStyle/>
+          <a:p>
+            <a:pPr rtl="1" algn="r" indent="0" marL="0">
+              <a:buNone/>
+            </a:pPr>
+            <a:r>
+              <a:rPr lang="en-US" sz="1250" dirty="0">
+                <a:solidFill>
+                  <a:srgbClr val="6B5B45"/>
+                </a:solidFill>
+                <a:latin typeface="Arial" pitchFamily="34" charset="0"/>
+                <a:ea typeface="Arial" pitchFamily="34" charset="-122"/>
+                <a:cs typeface="Arial" pitchFamily="34" charset="-120"/>
+              </a:rPr>
+              <a:t>حُرِّرَ في شهر أغسطس من عام 2026  ·  النسخة الثانية عشرة</a:t>
+            </a:r>
+            <a:endParaRPr lang="en-US" sz="1250" dirty="0"/>
           </a:p>
         </p:txBody>
       </p:sp>

--- a/deck/دستور-عرش-الخميس-v12.pptx
+++ b/deck/دستور-عرش-الخميس-v12.pptx
@@ -11572,7 +11572,7 @@
                 <a:ea typeface="Arial" pitchFamily="34" charset="-122"/>
                 <a:cs typeface="Arial" pitchFamily="34" charset="-120"/>
               </a:rPr>
-              <a:t>تُحتسب الدورة المكتملة الأخيرة بوزن 2.5 — كأنها دورتان ونصف — وباقي الدورات بوزن 1، ولا تدخل دورة الحساب قبل أن يلعبها الستة.</a:t>
+              <a:t>تُحتسب الدورة الختامية للسنة (السادسة) بوزن 2.5 — كأنها دورتان ونصف — وباقي الدورات بوزن 1، ولا تدخل دورة الحساب قبل أن يلعبها الستة.</a:t>
             </a:r>
             <a:endParaRPr lang="en-US" sz="1350" dirty="0"/>
           </a:p>
@@ -12933,7 +12933,7 @@
                 <a:ea typeface="Arial" pitchFamily="34" charset="-122"/>
                 <a:cs typeface="Arial" pitchFamily="34" charset="-120"/>
               </a:rPr>
-              <a:t>ستة ملوك.  عرشٌ واحد.  ودورةٌ أخيرة تزن ضعفين ونصفاً.</a:t>
+              <a:t>ستة ملوك.  عرشٌ واحد.  ودورةٌ سادسةٌ تزن ضعفين ونصفاً.</a:t>
             </a:r>
             <a:endParaRPr lang="en-US" sz="2000" dirty="0"/>
           </a:p>
@@ -13248,7 +13248,7 @@
                 <a:ea typeface="Arial" pitchFamily="34" charset="-122"/>
                 <a:cs typeface="Arial" pitchFamily="34" charset="-120"/>
               </a:rPr>
-              <a:t>وزن هذه الدورة وحدها</a:t>
+              <a:t>وزن الدورة السادسة وحدها</a:t>
             </a:r>
             <a:endParaRPr lang="en-US" sz="1250" dirty="0"/>
           </a:p>
